--- a/yocto_training_all_session_decks/session_decks/D3S2_Kernel_Hardening.pptx
+++ b/yocto_training_all_session_decks/session_decks/D3S2_Kernel_Hardening.pptx
@@ -5,26 +5,26 @@
     <p:sldMasterId id="2147483648" r:id="rId1"/>
   </p:sldMasterIdLst>
   <p:notesMasterIdLst>
-    <p:notesMasterId r:id="rId8"/>
+    <p:notesMasterId r:id="rId11"/>
   </p:notesMasterIdLst>
   <p:handoutMasterIdLst>
-    <p:handoutMasterId r:id="rId9"/>
+    <p:handoutMasterId r:id="rId12"/>
   </p:handoutMasterIdLst>
   <p:sldIdLst>
-    <p:sldId id="1007" r:id="rId18"/>
-    <p:sldId id="1008" r:id="rId19"/>
-    <p:sldId id="1009" r:id="rId20"/>
-    <p:sldId id="1010" r:id="rId21"/>
-    <p:sldId id="1011" r:id="rId22"/>
-    <p:sldId id="1012" r:id="rId23"/>
-    <p:sldId id="1013" r:id="rId24"/>
-    <p:sldId id="1014" r:id="rId25"/>
-    <p:sldId id="1015" r:id="rId26"/>
+    <p:sldId id="1007" r:id="rId2"/>
+    <p:sldId id="1008" r:id="rId3"/>
+    <p:sldId id="1009" r:id="rId4"/>
+    <p:sldId id="1010" r:id="rId5"/>
+    <p:sldId id="1011" r:id="rId6"/>
+    <p:sldId id="1012" r:id="rId7"/>
+    <p:sldId id="1013" r:id="rId8"/>
+    <p:sldId id="1014" r:id="rId9"/>
+    <p:sldId id="1015" r:id="rId10"/>
   </p:sldIdLst>
   <p:sldSz cx="12192000" cy="6858000"/>
   <p:notesSz cx="6858000" cy="9144000"/>
   <p:custDataLst>
-    <p:tags r:id="rId10"/>
+    <p:tags r:id="rId13"/>
   </p:custDataLst>
   <p:defaultTextStyle>
     <a:defPPr>
@@ -2930,7 +2930,7 @@
           <a:p>
             <a:fld id="{0CEC647C-F50C-4F78-AA33-D7AA6CDA18EE}" type="datetimeFigureOut">
               <a:rPr lang="en-US" smtClean="0"/>
-              <a:t>7/13/2025</a:t>
+              <a:t>6/11/2026</a:t>
             </a:fld>
             <a:endParaRPr lang="en-US"/>
           </a:p>
@@ -3095,7 +3095,7 @@
           <a:p>
             <a:fld id="{3A83341F-E62C-483B-84B4-966F8BE46097}" type="datetimeFigureOut">
               <a:rPr lang="en-US" smtClean="0"/>
-              <a:t>7/13/2025</a:t>
+              <a:t>6/11/2026</a:t>
             </a:fld>
             <a:endParaRPr lang="en-US"/>
           </a:p>
@@ -5179,8 +5179,8 @@
 </p:sldMaster>
 </file>
 
-<file path=ppt/slides/slide10.xml><?xml version="1.0" encoding="utf-8"?>
-<p:sld xmlns:a="http://schemas.openxmlformats.org/drawingml/2006/main" xmlns:p="http://schemas.openxmlformats.org/presentationml/2006/main" xmlns:r="http://schemas.openxmlformats.org/officeDocument/2006/relationships">
+<file path=ppt/slides/slide1.xml><?xml version="1.0" encoding="utf-8"?>
+<p:sld xmlns:a="http://schemas.openxmlformats.org/drawingml/2006/main" xmlns:r="http://schemas.openxmlformats.org/officeDocument/2006/relationships" xmlns:p="http://schemas.openxmlformats.org/presentationml/2006/main">
   <p:cSld>
     <p:spTree>
       <p:nvGrpSpPr>
@@ -5188,7 +5188,93 @@
         <p:cNvGrpSpPr/>
         <p:nvPr/>
       </p:nvGrpSpPr>
-      <p:grpSpPr/>
+      <p:grpSpPr>
+        <a:xfrm>
+          <a:off x="0" y="0"/>
+          <a:ext cx="0" cy="0"/>
+          <a:chOff x="0" y="0"/>
+          <a:chExt cx="0" cy="0"/>
+        </a:xfrm>
+      </p:grpSpPr>
+      <p:sp>
+        <p:nvSpPr>
+          <p:cNvPr id="2" name="Title 1"/>
+          <p:cNvSpPr>
+            <a:spLocks noGrp="1"/>
+          </p:cNvSpPr>
+          <p:nvPr>
+            <p:ph type="ctrTitle"/>
+          </p:nvPr>
+        </p:nvSpPr>
+        <p:spPr/>
+        <p:txBody>
+          <a:bodyPr/>
+          <a:lstStyle/>
+          <a:p>
+            <a:r>
+              <a:rPr sz="4400" b="1">
+                <a:solidFill>
+                  <a:srgbClr val="FFFFFF"/>
+                </a:solidFill>
+                <a:latin typeface="Calibri"/>
+              </a:rPr>
+              <a:t>Kernel Hardening (KSPP)</a:t>
+            </a:r>
+          </a:p>
+        </p:txBody>
+      </p:sp>
+      <p:sp>
+        <p:nvSpPr>
+          <p:cNvPr id="3" name="Subtitle 2"/>
+          <p:cNvSpPr>
+            <a:spLocks noGrp="1"/>
+          </p:cNvSpPr>
+          <p:nvPr>
+            <p:ph type="subTitle" idx="1"/>
+          </p:nvPr>
+        </p:nvSpPr>
+        <p:spPr/>
+        <p:txBody>
+          <a:bodyPr/>
+          <a:lstStyle/>
+          <a:p>
+            <a:r>
+              <a:rPr sz="1800" dirty="0">
+                <a:solidFill>
+                  <a:srgbClr val="FFFFFF"/>
+                </a:solidFill>
+                <a:latin typeface="Calibri"/>
+              </a:rPr>
+              <a:t>Defending against entire attack classes</a:t>
+            </a:r>
+          </a:p>
+        </p:txBody>
+      </p:sp>
+    </p:spTree>
+  </p:cSld>
+  <p:clrMapOvr>
+    <a:masterClrMapping/>
+  </p:clrMapOvr>
+</p:sld>
+</file>
+
+<file path=ppt/slides/slide2.xml><?xml version="1.0" encoding="utf-8"?>
+<p:sld xmlns:a="http://schemas.openxmlformats.org/drawingml/2006/main" xmlns:r="http://schemas.openxmlformats.org/officeDocument/2006/relationships" xmlns:p="http://schemas.openxmlformats.org/presentationml/2006/main">
+  <p:cSld>
+    <p:spTree>
+      <p:nvGrpSpPr>
+        <p:cNvPr id="1" name=""/>
+        <p:cNvGrpSpPr/>
+        <p:nvPr/>
+      </p:nvGrpSpPr>
+      <p:grpSpPr>
+        <a:xfrm>
+          <a:off x="0" y="0"/>
+          <a:ext cx="0" cy="0"/>
+          <a:chOff x="0" y="0"/>
+          <a:chExt cx="0" cy="0"/>
+        </a:xfrm>
+      </p:grpSpPr>
       <p:sp>
         <p:nvSpPr>
           <p:cNvPr id="2" name="Title 1"/>
@@ -5205,13 +5291,178 @@
           <a:lstStyle/>
           <a:p>
             <a:r>
-              <a:rPr sz="3200" b="1">
-                <a:solidFill>
-                  <a:srgbClr val="CC0066"/>
-                </a:solidFill>
+              <a:rPr sz="3200" b="1" dirty="0">
                 <a:latin typeface="Calibri"/>
               </a:rPr>
-              <a:t>Categories of Hardening</a:t>
+              <a:t>Session Agenda</a:t>
+            </a:r>
+          </a:p>
+        </p:txBody>
+      </p:sp>
+      <p:sp>
+        <p:nvSpPr>
+          <p:cNvPr id="3" name="TextBox 2"/>
+          <p:cNvSpPr txBox="1"/>
+          <p:nvPr/>
+        </p:nvSpPr>
+        <p:spPr>
+          <a:xfrm>
+            <a:off x="822960" y="1463040"/>
+            <a:ext cx="10515600" cy="5029200"/>
+          </a:xfrm>
+          <a:prstGeom prst="rect">
+            <a:avLst/>
+          </a:prstGeom>
+          <a:noFill/>
+        </p:spPr>
+        <p:txBody>
+          <a:bodyPr wrap="square" lIns="45720" rIns="45720">
+            <a:spAutoFit/>
+          </a:bodyPr>
+          <a:lstStyle/>
+          <a:p>
+            <a:pPr>
+              <a:spcAft>
+                <a:spcPts val="600"/>
+              </a:spcAft>
+            </a:pPr>
+            <a:r>
+              <a:rPr sz="2000" b="0" i="0">
+                <a:solidFill>
+                  <a:srgbClr val="333333"/>
+                </a:solidFill>
+                <a:latin typeface="Calibri"/>
+              </a:rPr>
+              <a:t>1.  What KSPP is and why it exists</a:t>
+            </a:r>
+          </a:p>
+          <a:p>
+            <a:pPr>
+              <a:spcAft>
+                <a:spcPts val="600"/>
+              </a:spcAft>
+            </a:pPr>
+            <a:r>
+              <a:rPr sz="2000" b="0" i="0">
+                <a:solidFill>
+                  <a:srgbClr val="333333"/>
+                </a:solidFill>
+                <a:latin typeface="Calibri"/>
+              </a:rPr>
+              <a:t>2.  Categories of kernel hardening</a:t>
+            </a:r>
+          </a:p>
+          <a:p>
+            <a:pPr>
+              <a:spcAft>
+                <a:spcPts val="600"/>
+              </a:spcAft>
+            </a:pPr>
+            <a:r>
+              <a:rPr sz="2000" b="0" i="0">
+                <a:solidFill>
+                  <a:srgbClr val="333333"/>
+                </a:solidFill>
+                <a:latin typeface="Calibri"/>
+              </a:rPr>
+              <a:t>3.  Key CONFIG options walkthrough</a:t>
+            </a:r>
+          </a:p>
+          <a:p>
+            <a:pPr>
+              <a:spcAft>
+                <a:spcPts val="600"/>
+              </a:spcAft>
+            </a:pPr>
+            <a:r>
+              <a:rPr sz="2000" b="0" i="0">
+                <a:solidFill>
+                  <a:srgbClr val="333333"/>
+                </a:solidFill>
+                <a:latin typeface="Calibri"/>
+              </a:rPr>
+              <a:t>4.  Cost vs benefit</a:t>
+            </a:r>
+          </a:p>
+          <a:p>
+            <a:pPr>
+              <a:spcAft>
+                <a:spcPts val="600"/>
+              </a:spcAft>
+            </a:pPr>
+            <a:r>
+              <a:rPr sz="2000" b="0" i="0">
+                <a:solidFill>
+                  <a:srgbClr val="333333"/>
+                </a:solidFill>
+                <a:latin typeface="Calibri"/>
+              </a:rPr>
+              <a:t>5.  Applying the hardening fragment to TrainerGW</a:t>
+            </a:r>
+          </a:p>
+          <a:p>
+            <a:pPr>
+              <a:spcAft>
+                <a:spcPts val="600"/>
+              </a:spcAft>
+            </a:pPr>
+            <a:r>
+              <a:rPr sz="2000" b="0" i="0">
+                <a:solidFill>
+                  <a:srgbClr val="333333"/>
+                </a:solidFill>
+                <a:latin typeface="Calibri"/>
+              </a:rPr>
+              <a:t>6.  Module signing in 60 seconds</a:t>
+            </a:r>
+          </a:p>
+        </p:txBody>
+      </p:sp>
+    </p:spTree>
+  </p:cSld>
+  <p:clrMapOvr>
+    <a:masterClrMapping/>
+  </p:clrMapOvr>
+</p:sld>
+</file>
+
+<file path=ppt/slides/slide3.xml><?xml version="1.0" encoding="utf-8"?>
+<p:sld xmlns:a="http://schemas.openxmlformats.org/drawingml/2006/main" xmlns:r="http://schemas.openxmlformats.org/officeDocument/2006/relationships" xmlns:p="http://schemas.openxmlformats.org/presentationml/2006/main">
+  <p:cSld>
+    <p:spTree>
+      <p:nvGrpSpPr>
+        <p:cNvPr id="1" name=""/>
+        <p:cNvGrpSpPr/>
+        <p:nvPr/>
+      </p:nvGrpSpPr>
+      <p:grpSpPr>
+        <a:xfrm>
+          <a:off x="0" y="0"/>
+          <a:ext cx="0" cy="0"/>
+          <a:chOff x="0" y="0"/>
+          <a:chExt cx="0" cy="0"/>
+        </a:xfrm>
+      </p:grpSpPr>
+      <p:sp>
+        <p:nvSpPr>
+          <p:cNvPr id="2" name="Title 1"/>
+          <p:cNvSpPr>
+            <a:spLocks noGrp="1"/>
+          </p:cNvSpPr>
+          <p:nvPr>
+            <p:ph type="title"/>
+          </p:nvPr>
+        </p:nvSpPr>
+        <p:spPr/>
+        <p:txBody>
+          <a:bodyPr/>
+          <a:lstStyle/>
+          <a:p>
+            <a:r>
+              <a:rPr sz="3200" b="1" dirty="0">
+                <a:latin typeface="Calibri"/>
+              </a:rPr>
+              <a:t>What KSPP Is</a:t>
             </a:r>
           </a:p>
         </p:txBody>
@@ -5233,7 +5484,325 @@
           <a:noFill/>
         </p:spPr>
         <p:txBody>
-          <a:bodyPr wrap="square" anchor="t" lIns="45720" rIns="45720">
+          <a:bodyPr wrap="square" lIns="45720" rIns="45720" anchor="t">
+            <a:spAutoFit/>
+          </a:bodyPr>
+          <a:lstStyle/>
+          <a:p>
+            <a:pPr algn="l"/>
+            <a:r>
+              <a:rPr sz="1500" b="0" i="1">
+                <a:solidFill>
+                  <a:srgbClr val="666666"/>
+                </a:solidFill>
+                <a:latin typeface="Calibri"/>
+              </a:rPr>
+              <a:t>Kernel Self Protection Project — a community effort to make kernels harder to exploit.</a:t>
+            </a:r>
+          </a:p>
+        </p:txBody>
+      </p:sp>
+      <p:sp>
+        <p:nvSpPr>
+          <p:cNvPr id="4" name="TextBox 3"/>
+          <p:cNvSpPr txBox="1"/>
+          <p:nvPr/>
+        </p:nvSpPr>
+        <p:spPr>
+          <a:xfrm>
+            <a:off x="822960" y="1783080"/>
+            <a:ext cx="10515600" cy="4385816"/>
+          </a:xfrm>
+          <a:prstGeom prst="rect">
+            <a:avLst/>
+          </a:prstGeom>
+          <a:noFill/>
+        </p:spPr>
+        <p:txBody>
+          <a:bodyPr wrap="square" lIns="45720" rIns="45720">
+            <a:spAutoFit/>
+          </a:bodyPr>
+          <a:lstStyle/>
+          <a:p>
+            <a:pPr>
+              <a:spcAft>
+                <a:spcPts val="400"/>
+              </a:spcAft>
+            </a:pPr>
+            <a:r>
+              <a:rPr sz="2000" b="1" i="0" dirty="0">
+                <a:solidFill>
+                  <a:srgbClr val="CC0066"/>
+                </a:solidFill>
+                <a:latin typeface="Calibri"/>
+              </a:rPr>
+              <a:t>The premise</a:t>
+            </a:r>
+          </a:p>
+          <a:p>
+            <a:pPr>
+              <a:spcAft>
+                <a:spcPts val="1000"/>
+              </a:spcAft>
+            </a:pPr>
+            <a:r>
+              <a:rPr sz="1600" b="0" i="0" dirty="0">
+                <a:solidFill>
+                  <a:srgbClr val="333333"/>
+                </a:solidFill>
+                <a:latin typeface="Calibri"/>
+              </a:rPr>
+              <a:t>Kernel bugs will exist. Make them harder to weaponize.</a:t>
+            </a:r>
+          </a:p>
+          <a:p>
+            <a:pPr>
+              <a:spcAft>
+                <a:spcPts val="400"/>
+              </a:spcAft>
+            </a:pPr>
+            <a:r>
+              <a:rPr sz="2000" b="1" i="0" dirty="0">
+                <a:solidFill>
+                  <a:srgbClr val="CC0066"/>
+                </a:solidFill>
+                <a:latin typeface="Calibri"/>
+              </a:rPr>
+              <a:t>KSPP's approach</a:t>
+            </a:r>
+          </a:p>
+          <a:p>
+            <a:pPr>
+              <a:spcAft>
+                <a:spcPts val="400"/>
+              </a:spcAft>
+            </a:pPr>
+            <a:r>
+              <a:rPr sz="1600" b="0" i="0" dirty="0">
+                <a:solidFill>
+                  <a:srgbClr val="333333"/>
+                </a:solidFill>
+                <a:latin typeface="Calibri"/>
+              </a:rPr>
+              <a:t>• Maintain a recommended kernel config</a:t>
+            </a:r>
+          </a:p>
+          <a:p>
+            <a:pPr>
+              <a:spcAft>
+                <a:spcPts val="400"/>
+              </a:spcAft>
+            </a:pPr>
+            <a:r>
+              <a:rPr sz="1600" b="0" i="0" dirty="0">
+                <a:solidFill>
+                  <a:srgbClr val="333333"/>
+                </a:solidFill>
+                <a:latin typeface="Calibri"/>
+              </a:rPr>
+              <a:t>• Track which kernel versions implement which protections</a:t>
+            </a:r>
+          </a:p>
+          <a:p>
+            <a:pPr>
+              <a:spcAft>
+                <a:spcPts val="1000"/>
+              </a:spcAft>
+            </a:pPr>
+            <a:r>
+              <a:rPr sz="1600" b="0" i="0" dirty="0">
+                <a:solidFill>
+                  <a:srgbClr val="333333"/>
+                </a:solidFill>
+                <a:latin typeface="Calibri"/>
+              </a:rPr>
+              <a:t>• Document what each option blocks</a:t>
+            </a:r>
+          </a:p>
+          <a:p>
+            <a:pPr>
+              <a:spcAft>
+                <a:spcPts val="400"/>
+              </a:spcAft>
+            </a:pPr>
+            <a:r>
+              <a:rPr sz="2000" b="1" i="0" dirty="0">
+                <a:solidFill>
+                  <a:srgbClr val="663399"/>
+                </a:solidFill>
+                <a:latin typeface="Calibri"/>
+              </a:rPr>
+              <a:t>Why apply it for embedded</a:t>
+            </a:r>
+          </a:p>
+          <a:p>
+            <a:pPr>
+              <a:spcAft>
+                <a:spcPts val="400"/>
+              </a:spcAft>
+            </a:pPr>
+            <a:r>
+              <a:rPr sz="1600" b="0" i="0" dirty="0">
+                <a:solidFill>
+                  <a:srgbClr val="333333"/>
+                </a:solidFill>
+                <a:latin typeface="Calibri"/>
+              </a:rPr>
+              <a:t>• Devices are often unpatched for years</a:t>
+            </a:r>
+          </a:p>
+          <a:p>
+            <a:pPr>
+              <a:spcAft>
+                <a:spcPts val="400"/>
+              </a:spcAft>
+            </a:pPr>
+            <a:r>
+              <a:rPr sz="1600" b="0" i="0" dirty="0">
+                <a:solidFill>
+                  <a:srgbClr val="333333"/>
+                </a:solidFill>
+                <a:latin typeface="Calibri"/>
+              </a:rPr>
+              <a:t>• Physical access is often easier than for servers</a:t>
+            </a:r>
+          </a:p>
+          <a:p>
+            <a:pPr>
+              <a:spcAft>
+                <a:spcPts val="400"/>
+              </a:spcAft>
+            </a:pPr>
+            <a:r>
+              <a:rPr sz="1600" b="0" i="0" dirty="0">
+                <a:solidFill>
+                  <a:srgbClr val="333333"/>
+                </a:solidFill>
+                <a:latin typeface="Calibri"/>
+              </a:rPr>
+              <a:t>• Compromise is hard to detect remotely</a:t>
+            </a:r>
+          </a:p>
+          <a:p>
+            <a:pPr>
+              <a:spcAft>
+                <a:spcPts val="1000"/>
+              </a:spcAft>
+            </a:pPr>
+            <a:r>
+              <a:rPr sz="1600" b="0" i="0" dirty="0">
+                <a:solidFill>
+                  <a:srgbClr val="333333"/>
+                </a:solidFill>
+                <a:latin typeface="Calibri"/>
+              </a:rPr>
+              <a:t>• Defense-in-depth buys you time</a:t>
+            </a:r>
+          </a:p>
+          <a:p>
+            <a:pPr>
+              <a:spcAft>
+                <a:spcPts val="400"/>
+              </a:spcAft>
+            </a:pPr>
+            <a:r>
+              <a:rPr sz="2000" b="1" i="0" dirty="0">
+                <a:solidFill>
+                  <a:srgbClr val="663399"/>
+                </a:solidFill>
+                <a:latin typeface="Calibri"/>
+              </a:rPr>
+              <a:t>Reference</a:t>
+            </a:r>
+          </a:p>
+          <a:p>
+            <a:pPr>
+              <a:spcAft>
+                <a:spcPts val="400"/>
+              </a:spcAft>
+            </a:pPr>
+            <a:r>
+              <a:rPr lang="en-IN" sz="1600" dirty="0">
+                <a:hlinkClick r:id="rId2"/>
+              </a:rPr>
+              <a:t>Recommended Settings | Linux Kernel Self-Protection Project</a:t>
+            </a:r>
+            <a:endParaRPr sz="1600" b="0" i="0" dirty="0">
+              <a:solidFill>
+                <a:srgbClr val="333333"/>
+              </a:solidFill>
+              <a:latin typeface="Consolas"/>
+            </a:endParaRPr>
+          </a:p>
+        </p:txBody>
+      </p:sp>
+    </p:spTree>
+  </p:cSld>
+  <p:clrMapOvr>
+    <a:masterClrMapping/>
+  </p:clrMapOvr>
+</p:sld>
+</file>
+
+<file path=ppt/slides/slide4.xml><?xml version="1.0" encoding="utf-8"?>
+<p:sld xmlns:a="http://schemas.openxmlformats.org/drawingml/2006/main" xmlns:r="http://schemas.openxmlformats.org/officeDocument/2006/relationships" xmlns:p="http://schemas.openxmlformats.org/presentationml/2006/main">
+  <p:cSld>
+    <p:spTree>
+      <p:nvGrpSpPr>
+        <p:cNvPr id="1" name=""/>
+        <p:cNvGrpSpPr/>
+        <p:nvPr/>
+      </p:nvGrpSpPr>
+      <p:grpSpPr>
+        <a:xfrm>
+          <a:off x="0" y="0"/>
+          <a:ext cx="0" cy="0"/>
+          <a:chOff x="0" y="0"/>
+          <a:chExt cx="0" cy="0"/>
+        </a:xfrm>
+      </p:grpSpPr>
+      <p:sp>
+        <p:nvSpPr>
+          <p:cNvPr id="2" name="Title 1"/>
+          <p:cNvSpPr>
+            <a:spLocks noGrp="1"/>
+          </p:cNvSpPr>
+          <p:nvPr>
+            <p:ph type="title"/>
+          </p:nvPr>
+        </p:nvSpPr>
+        <p:spPr/>
+        <p:txBody>
+          <a:bodyPr/>
+          <a:lstStyle/>
+          <a:p>
+            <a:r>
+              <a:rPr sz="3200" b="1" dirty="0">
+                <a:latin typeface="Calibri"/>
+              </a:rPr>
+              <a:t>Categories of Hardening</a:t>
+            </a:r>
+          </a:p>
+        </p:txBody>
+      </p:sp>
+      <p:sp>
+        <p:nvSpPr>
+          <p:cNvPr id="3" name="TextBox 2"/>
+          <p:cNvSpPr txBox="1"/>
+          <p:nvPr/>
+        </p:nvSpPr>
+        <p:spPr>
+          <a:xfrm>
+            <a:off x="822960" y="1417320"/>
+            <a:ext cx="10515600" cy="365760"/>
+          </a:xfrm>
+          <a:prstGeom prst="rect">
+            <a:avLst/>
+          </a:prstGeom>
+          <a:noFill/>
+        </p:spPr>
+        <p:txBody>
+          <a:bodyPr wrap="square" lIns="45720" rIns="45720" anchor="t">
             <a:spAutoFit/>
           </a:bodyPr>
           <a:lstStyle/>
@@ -5288,7 +5857,7 @@
           </a:fontRef>
         </p:style>
         <p:txBody>
-          <a:bodyPr rtlCol="0" anchor="ctr" lIns="182880"/>
+          <a:bodyPr lIns="182880" rtlCol="0" anchor="ctr"/>
           <a:lstStyle/>
           <a:p>
             <a:pPr algn="ctr"/>
@@ -5358,6 +5927,7 @@
           <a:lstStyle/>
           <a:p>
             <a:pPr algn="ctr"/>
+            <a:endParaRPr/>
           </a:p>
         </p:txBody>
       </p:sp>
@@ -5370,7 +5940,7 @@
         <p:spPr>
           <a:xfrm>
             <a:off x="731519" y="2514600"/>
-            <a:ext cx="3337560" cy="3474720"/>
+            <a:ext cx="3337560" cy="2369880"/>
           </a:xfrm>
           <a:prstGeom prst="rect">
             <a:avLst/>
@@ -5389,7 +5959,7 @@
               </a:spcAft>
             </a:pPr>
             <a:r>
-              <a:rPr sz="1100" b="0" i="0">
+              <a:rPr sz="1600" b="0" i="0" dirty="0">
                 <a:solidFill>
                   <a:srgbClr val="333333"/>
                 </a:solidFill>
@@ -5405,7 +5975,7 @@
               </a:spcAft>
             </a:pPr>
             <a:r>
-              <a:rPr sz="1100" b="0" i="0">
+              <a:rPr sz="1600" b="0" i="0" dirty="0">
                 <a:solidFill>
                   <a:srgbClr val="333333"/>
                 </a:solidFill>
@@ -5421,7 +5991,7 @@
               </a:spcAft>
             </a:pPr>
             <a:r>
-              <a:rPr sz="1100" b="0" i="0">
+              <a:rPr sz="1600" b="0" i="0" dirty="0">
                 <a:solidFill>
                   <a:srgbClr val="333333"/>
                 </a:solidFill>
@@ -5437,7 +6007,7 @@
               </a:spcAft>
             </a:pPr>
             <a:r>
-              <a:rPr sz="1100" b="0" i="0">
+              <a:rPr sz="1600" b="0" i="0" dirty="0">
                 <a:solidFill>
                   <a:srgbClr val="333333"/>
                 </a:solidFill>
@@ -5453,7 +6023,7 @@
               </a:spcAft>
             </a:pPr>
             <a:r>
-              <a:rPr sz="1100" b="0" i="0">
+              <a:rPr sz="1600" b="0" i="0" dirty="0">
                 <a:solidFill>
                   <a:srgbClr val="333333"/>
                 </a:solidFill>
@@ -5468,15 +6038,12 @@
                 <a:spcPts val="400"/>
               </a:spcAft>
             </a:pPr>
-            <a:r>
-              <a:rPr sz="1100" b="0" i="0">
-                <a:solidFill>
-                  <a:srgbClr val="333333"/>
-                </a:solidFill>
-                <a:latin typeface="Calibri"/>
-              </a:rPr>
-              <a:t/>
-            </a:r>
+            <a:endParaRPr sz="1600" b="0" i="0" dirty="0">
+              <a:solidFill>
+                <a:srgbClr val="333333"/>
+              </a:solidFill>
+              <a:latin typeface="Calibri"/>
+            </a:endParaRPr>
           </a:p>
           <a:p>
             <a:pPr>
@@ -5485,7 +6052,7 @@
               </a:spcAft>
             </a:pPr>
             <a:r>
-              <a:rPr sz="1100" b="0" i="0">
+              <a:rPr sz="1600" b="0" i="0" dirty="0">
                 <a:solidFill>
                   <a:srgbClr val="333333"/>
                 </a:solidFill>
@@ -5533,7 +6100,7 @@
           </a:fontRef>
         </p:style>
         <p:txBody>
-          <a:bodyPr rtlCol="0" anchor="ctr" lIns="182880"/>
+          <a:bodyPr lIns="182880" rtlCol="0" anchor="ctr"/>
           <a:lstStyle/>
           <a:p>
             <a:pPr algn="ctr"/>
@@ -5603,6 +6170,7 @@
           <a:lstStyle/>
           <a:p>
             <a:pPr algn="ctr"/>
+            <a:endParaRPr/>
           </a:p>
         </p:txBody>
       </p:sp>
@@ -5615,7 +6183,7 @@
         <p:spPr>
           <a:xfrm>
             <a:off x="4389120" y="2514600"/>
-            <a:ext cx="3337560" cy="3474720"/>
+            <a:ext cx="3337560" cy="2072362"/>
           </a:xfrm>
           <a:prstGeom prst="rect">
             <a:avLst/>
@@ -5634,7 +6202,7 @@
               </a:spcAft>
             </a:pPr>
             <a:r>
-              <a:rPr sz="1100" b="0" i="0">
+              <a:rPr sz="1600" b="0" i="0" dirty="0">
                 <a:solidFill>
                   <a:srgbClr val="333333"/>
                 </a:solidFill>
@@ -5650,7 +6218,7 @@
               </a:spcAft>
             </a:pPr>
             <a:r>
-              <a:rPr sz="1100" b="0" i="0">
+              <a:rPr sz="1600" b="0" i="0" dirty="0">
                 <a:solidFill>
                   <a:srgbClr val="333333"/>
                 </a:solidFill>
@@ -5666,7 +6234,7 @@
               </a:spcAft>
             </a:pPr>
             <a:r>
-              <a:rPr sz="1100" b="0" i="0">
+              <a:rPr sz="1600" b="0" i="0" dirty="0">
                 <a:solidFill>
                   <a:srgbClr val="333333"/>
                 </a:solidFill>
@@ -5682,7 +6250,7 @@
               </a:spcAft>
             </a:pPr>
             <a:r>
-              <a:rPr sz="1100" b="0" i="0">
+              <a:rPr sz="1600" b="0" i="0" dirty="0">
                 <a:solidFill>
                   <a:srgbClr val="333333"/>
                 </a:solidFill>
@@ -5698,7 +6266,7 @@
               </a:spcAft>
             </a:pPr>
             <a:r>
-              <a:rPr sz="1100" b="0" i="0">
+              <a:rPr sz="1600" b="0" i="0" dirty="0">
                 <a:solidFill>
                   <a:srgbClr val="333333"/>
                 </a:solidFill>
@@ -5706,6 +6274,12 @@
               </a:rPr>
               <a:t>• INIT_STACK_ALL_ZERO</a:t>
             </a:r>
+            <a:endParaRPr b="0" i="0" dirty="0">
+              <a:solidFill>
+                <a:srgbClr val="333333"/>
+              </a:solidFill>
+              <a:latin typeface="Calibri"/>
+            </a:endParaRPr>
           </a:p>
           <a:p>
             <a:pPr>
@@ -5714,23 +6288,7 @@
               </a:spcAft>
             </a:pPr>
             <a:r>
-              <a:rPr sz="1100" b="0" i="0">
-                <a:solidFill>
-                  <a:srgbClr val="333333"/>
-                </a:solidFill>
-                <a:latin typeface="Calibri"/>
-              </a:rPr>
-              <a:t/>
-            </a:r>
-          </a:p>
-          <a:p>
-            <a:pPr>
-              <a:spcAft>
-                <a:spcPts val="400"/>
-              </a:spcAft>
-            </a:pPr>
-            <a:r>
-              <a:rPr sz="1100" b="0" i="0">
+              <a:rPr sz="1600" b="0" i="0" dirty="0">
                 <a:solidFill>
                   <a:srgbClr val="333333"/>
                 </a:solidFill>
@@ -5778,7 +6336,7 @@
           </a:fontRef>
         </p:style>
         <p:txBody>
-          <a:bodyPr rtlCol="0" anchor="ctr" lIns="182880"/>
+          <a:bodyPr lIns="182880" rtlCol="0" anchor="ctr"/>
           <a:lstStyle/>
           <a:p>
             <a:pPr algn="ctr"/>
@@ -5848,6 +6406,7 @@
           <a:lstStyle/>
           <a:p>
             <a:pPr algn="ctr"/>
+            <a:endParaRPr/>
           </a:p>
         </p:txBody>
       </p:sp>
@@ -5860,7 +6419,7 @@
         <p:spPr>
           <a:xfrm>
             <a:off x="8046719" y="2514600"/>
-            <a:ext cx="3337560" cy="3474720"/>
+            <a:ext cx="3337560" cy="2072362"/>
           </a:xfrm>
           <a:prstGeom prst="rect">
             <a:avLst/>
@@ -5879,7 +6438,7 @@
               </a:spcAft>
             </a:pPr>
             <a:r>
-              <a:rPr sz="1100" b="0" i="0">
+              <a:rPr sz="1600" b="0" i="0" dirty="0">
                 <a:solidFill>
                   <a:srgbClr val="333333"/>
                 </a:solidFill>
@@ -5895,7 +6454,7 @@
               </a:spcAft>
             </a:pPr>
             <a:r>
-              <a:rPr sz="1100" b="0" i="0">
+              <a:rPr sz="1600" b="0" i="0" dirty="0">
                 <a:solidFill>
                   <a:srgbClr val="333333"/>
                 </a:solidFill>
@@ -5911,7 +6470,7 @@
               </a:spcAft>
             </a:pPr>
             <a:r>
-              <a:rPr sz="1100" b="0" i="0">
+              <a:rPr sz="1600" b="0" i="0" dirty="0">
                 <a:solidFill>
                   <a:srgbClr val="333333"/>
                 </a:solidFill>
@@ -5927,7 +6486,7 @@
               </a:spcAft>
             </a:pPr>
             <a:r>
-              <a:rPr sz="1100" b="0" i="0">
+              <a:rPr sz="1600" b="0" i="0" dirty="0">
                 <a:solidFill>
                   <a:srgbClr val="333333"/>
                 </a:solidFill>
@@ -5942,15 +6501,12 @@
                 <a:spcPts val="400"/>
               </a:spcAft>
             </a:pPr>
-            <a:r>
-              <a:rPr sz="1100" b="0" i="0">
-                <a:solidFill>
-                  <a:srgbClr val="333333"/>
-                </a:solidFill>
-                <a:latin typeface="Calibri"/>
-              </a:rPr>
-              <a:t/>
-            </a:r>
+            <a:endParaRPr sz="1600" b="0" i="0" dirty="0">
+              <a:solidFill>
+                <a:srgbClr val="333333"/>
+              </a:solidFill>
+              <a:latin typeface="Calibri"/>
+            </a:endParaRPr>
           </a:p>
           <a:p>
             <a:pPr>
@@ -5959,7 +6515,7 @@
               </a:spcAft>
             </a:pPr>
             <a:r>
-              <a:rPr sz="1100" b="0" i="0">
+              <a:rPr sz="1600" b="0" i="0" dirty="0">
                 <a:solidFill>
                   <a:srgbClr val="333333"/>
                 </a:solidFill>
@@ -5978,8 +6534,8 @@
 </p:sld>
 </file>
 
-<file path=ppt/slides/slide11.xml><?xml version="1.0" encoding="utf-8"?>
-<p:sld xmlns:a="http://schemas.openxmlformats.org/drawingml/2006/main" xmlns:p="http://schemas.openxmlformats.org/presentationml/2006/main" xmlns:r="http://schemas.openxmlformats.org/officeDocument/2006/relationships">
+<file path=ppt/slides/slide5.xml><?xml version="1.0" encoding="utf-8"?>
+<p:sld xmlns:a="http://schemas.openxmlformats.org/drawingml/2006/main" xmlns:r="http://schemas.openxmlformats.org/officeDocument/2006/relationships" xmlns:p="http://schemas.openxmlformats.org/presentationml/2006/main">
   <p:cSld>
     <p:spTree>
       <p:nvGrpSpPr>
@@ -5987,7 +6543,14 @@
         <p:cNvGrpSpPr/>
         <p:nvPr/>
       </p:nvGrpSpPr>
-      <p:grpSpPr/>
+      <p:grpSpPr>
+        <a:xfrm>
+          <a:off x="0" y="0"/>
+          <a:ext cx="0" cy="0"/>
+          <a:chOff x="0" y="0"/>
+          <a:chExt cx="0" cy="0"/>
+        </a:xfrm>
+      </p:grpSpPr>
       <p:sp>
         <p:nvSpPr>
           <p:cNvPr id="2" name="Title 1"/>
@@ -6004,10 +6567,7 @@
           <a:lstStyle/>
           <a:p>
             <a:r>
-              <a:rPr sz="3200" b="1">
-                <a:solidFill>
-                  <a:srgbClr val="CC0066"/>
-                </a:solidFill>
+              <a:rPr sz="3200" b="1" dirty="0">
                 <a:latin typeface="Calibri"/>
               </a:rPr>
               <a:t>Key Options Walkthrough</a:t>
@@ -6032,7 +6592,7 @@
           <a:noFill/>
         </p:spPr>
         <p:txBody>
-          <a:bodyPr wrap="square" anchor="t" lIns="45720" rIns="45720">
+          <a:bodyPr wrap="square" lIns="45720" rIns="45720" anchor="t">
             <a:spAutoFit/>
           </a:bodyPr>
           <a:lstStyle/>
@@ -6093,6 +6653,7 @@
           <a:lstStyle/>
           <a:p>
             <a:pPr algn="ctr"/>
+            <a:endParaRPr/>
           </a:p>
         </p:txBody>
       </p:sp>
@@ -6137,6 +6698,7 @@
           <a:lstStyle/>
           <a:p>
             <a:pPr algn="ctr"/>
+            <a:endParaRPr/>
           </a:p>
         </p:txBody>
       </p:sp>
@@ -6149,7 +6711,7 @@
         <p:spPr>
           <a:xfrm>
             <a:off x="1005840" y="1874519"/>
-            <a:ext cx="10241280" cy="4389120"/>
+            <a:ext cx="10241280" cy="4185761"/>
           </a:xfrm>
           <a:prstGeom prst="rect">
             <a:avLst/>
@@ -6168,7 +6730,7 @@
               </a:spcAft>
             </a:pPr>
             <a:r>
-              <a:rPr sz="1100">
+              <a:rPr sz="1400">
                 <a:solidFill>
                   <a:srgbClr val="2D2D2D"/>
                 </a:solidFill>
@@ -6184,7 +6746,7 @@
               </a:spcAft>
             </a:pPr>
             <a:r>
-              <a:rPr sz="1100" i="1">
+              <a:rPr sz="1400" i="1">
                 <a:solidFill>
                   <a:srgbClr val="808080"/>
                 </a:solidFill>
@@ -6200,7 +6762,7 @@
               </a:spcAft>
             </a:pPr>
             <a:r>
-              <a:rPr sz="1100">
+              <a:rPr sz="1400">
                 <a:solidFill>
                   <a:srgbClr val="2D2D2D"/>
                 </a:solidFill>
@@ -6216,7 +6778,7 @@
               </a:spcAft>
             </a:pPr>
             <a:r>
-              <a:rPr sz="1100">
+              <a:rPr sz="1400">
                 <a:solidFill>
                   <a:srgbClr val="2D2D2D"/>
                 </a:solidFill>
@@ -6232,7 +6794,7 @@
               </a:spcAft>
             </a:pPr>
             <a:r>
-              <a:rPr sz="1100" i="1">
+              <a:rPr sz="1400" i="1">
                 <a:solidFill>
                   <a:srgbClr val="808080"/>
                 </a:solidFill>
@@ -6248,7 +6810,7 @@
               </a:spcAft>
             </a:pPr>
             <a:r>
-              <a:rPr sz="1100">
+              <a:rPr sz="1400">
                 <a:solidFill>
                   <a:srgbClr val="2D2D2D"/>
                 </a:solidFill>
@@ -6264,7 +6826,7 @@
               </a:spcAft>
             </a:pPr>
             <a:r>
-              <a:rPr sz="1100">
+              <a:rPr sz="1400">
                 <a:solidFill>
                   <a:srgbClr val="2D2D2D"/>
                 </a:solidFill>
@@ -6280,7 +6842,7 @@
               </a:spcAft>
             </a:pPr>
             <a:r>
-              <a:rPr sz="1100" i="1">
+              <a:rPr sz="1400" i="1">
                 <a:solidFill>
                   <a:srgbClr val="808080"/>
                 </a:solidFill>
@@ -6296,7 +6858,7 @@
               </a:spcAft>
             </a:pPr>
             <a:r>
-              <a:rPr sz="1100">
+              <a:rPr sz="1400">
                 <a:solidFill>
                   <a:srgbClr val="2D2D2D"/>
                 </a:solidFill>
@@ -6312,7 +6874,7 @@
               </a:spcAft>
             </a:pPr>
             <a:r>
-              <a:rPr sz="1100">
+              <a:rPr sz="1400">
                 <a:solidFill>
                   <a:srgbClr val="2D2D2D"/>
                 </a:solidFill>
@@ -6328,7 +6890,7 @@
               </a:spcAft>
             </a:pPr>
             <a:r>
-              <a:rPr sz="1100" i="1">
+              <a:rPr sz="1400" i="1">
                 <a:solidFill>
                   <a:srgbClr val="808080"/>
                 </a:solidFill>
@@ -6344,7 +6906,7 @@
               </a:spcAft>
             </a:pPr>
             <a:r>
-              <a:rPr sz="1100">
+              <a:rPr sz="1400">
                 <a:solidFill>
                   <a:srgbClr val="2D2D2D"/>
                 </a:solidFill>
@@ -6360,7 +6922,7 @@
               </a:spcAft>
             </a:pPr>
             <a:r>
-              <a:rPr sz="1100">
+              <a:rPr sz="1400">
                 <a:solidFill>
                   <a:srgbClr val="2D2D2D"/>
                 </a:solidFill>
@@ -6376,7 +6938,7 @@
               </a:spcAft>
             </a:pPr>
             <a:r>
-              <a:rPr sz="1100">
+              <a:rPr sz="1400">
                 <a:solidFill>
                   <a:srgbClr val="2D2D2D"/>
                 </a:solidFill>
@@ -6392,7 +6954,7 @@
               </a:spcAft>
             </a:pPr>
             <a:r>
-              <a:rPr sz="1100" i="1">
+              <a:rPr sz="1400" i="1">
                 <a:solidFill>
                   <a:srgbClr val="808080"/>
                 </a:solidFill>
@@ -6408,7 +6970,7 @@
               </a:spcAft>
             </a:pPr>
             <a:r>
-              <a:rPr sz="1100">
+              <a:rPr sz="1400">
                 <a:solidFill>
                   <a:srgbClr val="2D2D2D"/>
                 </a:solidFill>
@@ -6424,7 +6986,7 @@
               </a:spcAft>
             </a:pPr>
             <a:r>
-              <a:rPr sz="1100">
+              <a:rPr sz="1400">
                 <a:solidFill>
                   <a:srgbClr val="2D2D2D"/>
                 </a:solidFill>
@@ -6440,7 +7002,7 @@
               </a:spcAft>
             </a:pPr>
             <a:r>
-              <a:rPr sz="1100">
+              <a:rPr sz="1400">
                 <a:solidFill>
                   <a:srgbClr val="2D2D2D"/>
                 </a:solidFill>
@@ -6456,7 +7018,7 @@
               </a:spcAft>
             </a:pPr>
             <a:r>
-              <a:rPr sz="1100" i="1">
+              <a:rPr sz="1400" i="1">
                 <a:solidFill>
                   <a:srgbClr val="808080"/>
                 </a:solidFill>
@@ -6475,8 +7037,8 @@
 </p:sld>
 </file>
 
-<file path=ppt/slides/slide12.xml><?xml version="1.0" encoding="utf-8"?>
-<p:sld xmlns:a="http://schemas.openxmlformats.org/drawingml/2006/main" xmlns:p="http://schemas.openxmlformats.org/presentationml/2006/main" xmlns:r="http://schemas.openxmlformats.org/officeDocument/2006/relationships">
+<file path=ppt/slides/slide6.xml><?xml version="1.0" encoding="utf-8"?>
+<p:sld xmlns:a="http://schemas.openxmlformats.org/drawingml/2006/main" xmlns:r="http://schemas.openxmlformats.org/officeDocument/2006/relationships" xmlns:p="http://schemas.openxmlformats.org/presentationml/2006/main">
   <p:cSld>
     <p:spTree>
       <p:nvGrpSpPr>
@@ -6484,7 +7046,14 @@
         <p:cNvGrpSpPr/>
         <p:nvPr/>
       </p:nvGrpSpPr>
-      <p:grpSpPr/>
+      <p:grpSpPr>
+        <a:xfrm>
+          <a:off x="0" y="0"/>
+          <a:ext cx="0" cy="0"/>
+          <a:chOff x="0" y="0"/>
+          <a:chExt cx="0" cy="0"/>
+        </a:xfrm>
+      </p:grpSpPr>
       <p:sp>
         <p:nvSpPr>
           <p:cNvPr id="2" name="Title 1"/>
@@ -6501,10 +7070,7 @@
           <a:lstStyle/>
           <a:p>
             <a:r>
-              <a:rPr sz="3200" b="1">
-                <a:solidFill>
-                  <a:srgbClr val="CC0066"/>
-                </a:solidFill>
+              <a:rPr sz="3200" b="1" dirty="0">
                 <a:latin typeface="Calibri"/>
               </a:rPr>
               <a:t>Cost vs Benefit</a:t>
@@ -6529,7 +7095,7 @@
           <a:noFill/>
         </p:spPr>
         <p:txBody>
-          <a:bodyPr wrap="square" anchor="t" lIns="45720" rIns="45720">
+          <a:bodyPr wrap="square" lIns="45720" rIns="45720" anchor="t">
             <a:spAutoFit/>
           </a:bodyPr>
           <a:lstStyle/>
@@ -6590,6 +7156,7 @@
           <a:lstStyle/>
           <a:p>
             <a:pPr algn="ctr"/>
+            <a:endParaRPr/>
           </a:p>
         </p:txBody>
       </p:sp>
@@ -6610,7 +7177,7 @@
           <a:noFill/>
         </p:spPr>
         <p:txBody>
-          <a:bodyPr wrap="square" anchor="t" lIns="45720" rIns="45720">
+          <a:bodyPr wrap="square" lIns="45720" rIns="45720" anchor="t">
             <a:spAutoFit/>
           </a:bodyPr>
           <a:lstStyle/>
@@ -6637,7 +7204,7 @@
         <p:spPr>
           <a:xfrm>
             <a:off x="960120" y="2468880"/>
-            <a:ext cx="4937760" cy="3794760"/>
+            <a:ext cx="4937760" cy="3170099"/>
           </a:xfrm>
           <a:prstGeom prst="rect">
             <a:avLst/>
@@ -6656,7 +7223,7 @@
               </a:spcAft>
             </a:pPr>
             <a:r>
-              <a:rPr sz="1300" b="1" i="0">
+              <a:rPr sz="1600" b="1" i="0">
                 <a:solidFill>
                   <a:srgbClr val="CC0066"/>
                 </a:solidFill>
@@ -6672,7 +7239,7 @@
               </a:spcAft>
             </a:pPr>
             <a:r>
-              <a:rPr sz="1200" b="0" i="0">
+              <a:rPr sz="1600" b="0" i="0">
                 <a:solidFill>
                   <a:srgbClr val="333333"/>
                 </a:solidFill>
@@ -6688,7 +7255,7 @@
               </a:spcAft>
             </a:pPr>
             <a:r>
-              <a:rPr sz="1300" b="1" i="0">
+              <a:rPr sz="1600" b="1" i="0">
                 <a:solidFill>
                   <a:srgbClr val="CC0066"/>
                 </a:solidFill>
@@ -6704,7 +7271,7 @@
               </a:spcAft>
             </a:pPr>
             <a:r>
-              <a:rPr sz="1200" b="0" i="0">
+              <a:rPr sz="1600" b="0" i="0">
                 <a:solidFill>
                   <a:srgbClr val="333333"/>
                 </a:solidFill>
@@ -6720,7 +7287,7 @@
               </a:spcAft>
             </a:pPr>
             <a:r>
-              <a:rPr sz="1200" b="0" i="0">
+              <a:rPr sz="1600" b="0" i="0">
                 <a:solidFill>
                   <a:srgbClr val="333333"/>
                 </a:solidFill>
@@ -6736,7 +7303,7 @@
               </a:spcAft>
             </a:pPr>
             <a:r>
-              <a:rPr sz="1200" b="0" i="0">
+              <a:rPr sz="1600" b="0" i="0">
                 <a:solidFill>
                   <a:srgbClr val="333333"/>
                 </a:solidFill>
@@ -6752,7 +7319,7 @@
               </a:spcAft>
             </a:pPr>
             <a:r>
-              <a:rPr sz="1300" b="1" i="0">
+              <a:rPr sz="1600" b="1" i="0">
                 <a:solidFill>
                   <a:srgbClr val="CC0066"/>
                 </a:solidFill>
@@ -6768,7 +7335,7 @@
               </a:spcAft>
             </a:pPr>
             <a:r>
-              <a:rPr sz="1200" b="0" i="0">
+              <a:rPr sz="1600" b="0" i="0">
                 <a:solidFill>
                   <a:srgbClr val="333333"/>
                 </a:solidFill>
@@ -6784,7 +7351,7 @@
               </a:spcAft>
             </a:pPr>
             <a:r>
-              <a:rPr sz="1300" b="1" i="0">
+              <a:rPr sz="1600" b="1" i="0">
                 <a:solidFill>
                   <a:srgbClr val="CC0066"/>
                 </a:solidFill>
@@ -6800,7 +7367,7 @@
               </a:spcAft>
             </a:pPr>
             <a:r>
-              <a:rPr sz="1200" b="0" i="0">
+              <a:rPr sz="1600" b="0" i="0">
                 <a:solidFill>
                   <a:srgbClr val="333333"/>
                 </a:solidFill>
@@ -6854,6 +7421,7 @@
           <a:lstStyle/>
           <a:p>
             <a:pPr algn="ctr"/>
+            <a:endParaRPr/>
           </a:p>
         </p:txBody>
       </p:sp>
@@ -6874,7 +7442,7 @@
           <a:noFill/>
         </p:spPr>
         <p:txBody>
-          <a:bodyPr wrap="square" anchor="t" lIns="45720" rIns="45720">
+          <a:bodyPr wrap="square" lIns="45720" rIns="45720" anchor="t">
             <a:spAutoFit/>
           </a:bodyPr>
           <a:lstStyle/>
@@ -6901,7 +7469,7 @@
         <p:spPr>
           <a:xfrm>
             <a:off x="6400800" y="2468880"/>
-            <a:ext cx="4937760" cy="3794760"/>
+            <a:ext cx="4937760" cy="2821285"/>
           </a:xfrm>
           <a:prstGeom prst="rect">
             <a:avLst/>
@@ -6920,7 +7488,7 @@
               </a:spcAft>
             </a:pPr>
             <a:r>
-              <a:rPr sz="1300" b="1" i="0">
+              <a:rPr sz="1600" b="1" i="0" dirty="0">
                 <a:solidFill>
                   <a:srgbClr val="663399"/>
                 </a:solidFill>
@@ -6936,7 +7504,7 @@
               </a:spcAft>
             </a:pPr>
             <a:r>
-              <a:rPr sz="1200" b="0" i="0">
+              <a:rPr sz="1600" b="0" i="0" dirty="0">
                 <a:solidFill>
                   <a:srgbClr val="333333"/>
                 </a:solidFill>
@@ -6952,7 +7520,7 @@
               </a:spcAft>
             </a:pPr>
             <a:r>
-              <a:rPr sz="1200" b="0" i="0">
+              <a:rPr sz="1600" b="0" i="0" dirty="0">
                 <a:solidFill>
                   <a:srgbClr val="333333"/>
                 </a:solidFill>
@@ -6968,7 +7536,7 @@
               </a:spcAft>
             </a:pPr>
             <a:r>
-              <a:rPr sz="1200" b="0" i="0">
+              <a:rPr sz="1600" b="0" i="0" dirty="0">
                 <a:solidFill>
                   <a:srgbClr val="333333"/>
                 </a:solidFill>
@@ -6984,7 +7552,7 @@
               </a:spcAft>
             </a:pPr>
             <a:r>
-              <a:rPr sz="1200" b="0" i="0">
+              <a:rPr sz="1600" b="0" i="0" dirty="0">
                 <a:solidFill>
                   <a:srgbClr val="333333"/>
                 </a:solidFill>
@@ -7000,7 +7568,7 @@
               </a:spcAft>
             </a:pPr>
             <a:r>
-              <a:rPr sz="1300" b="1" i="0">
+              <a:rPr sz="1600" b="1" i="0" dirty="0">
                 <a:solidFill>
                   <a:srgbClr val="663399"/>
                 </a:solidFill>
@@ -7016,7 +7584,7 @@
               </a:spcAft>
             </a:pPr>
             <a:r>
-              <a:rPr sz="1200" b="0" i="0">
+              <a:rPr sz="1600" b="0" i="0" dirty="0">
                 <a:solidFill>
                   <a:srgbClr val="333333"/>
                 </a:solidFill>
@@ -7032,7 +7600,7 @@
               </a:spcAft>
             </a:pPr>
             <a:r>
-              <a:rPr sz="1300" b="1" i="0">
+              <a:rPr sz="1600" b="1" i="0" dirty="0">
                 <a:solidFill>
                   <a:srgbClr val="663399"/>
                 </a:solidFill>
@@ -7048,7 +7616,7 @@
               </a:spcAft>
             </a:pPr>
             <a:r>
-              <a:rPr sz="1200" b="0" i="0">
+              <a:rPr sz="1600" b="0" i="0" dirty="0">
                 <a:solidFill>
                   <a:srgbClr val="333333"/>
                 </a:solidFill>
@@ -7067,8 +7635,8 @@
 </p:sld>
 </file>
 
-<file path=ppt/slides/slide13.xml><?xml version="1.0" encoding="utf-8"?>
-<p:sld xmlns:a="http://schemas.openxmlformats.org/drawingml/2006/main" xmlns:p="http://schemas.openxmlformats.org/presentationml/2006/main" xmlns:r="http://schemas.openxmlformats.org/officeDocument/2006/relationships">
+<file path=ppt/slides/slide7.xml><?xml version="1.0" encoding="utf-8"?>
+<p:sld xmlns:a="http://schemas.openxmlformats.org/drawingml/2006/main" xmlns:r="http://schemas.openxmlformats.org/officeDocument/2006/relationships" xmlns:p="http://schemas.openxmlformats.org/presentationml/2006/main">
   <p:cSld>
     <p:spTree>
       <p:nvGrpSpPr>
@@ -7076,7 +7644,14 @@
         <p:cNvGrpSpPr/>
         <p:nvPr/>
       </p:nvGrpSpPr>
-      <p:grpSpPr/>
+      <p:grpSpPr>
+        <a:xfrm>
+          <a:off x="0" y="0"/>
+          <a:ext cx="0" cy="0"/>
+          <a:chOff x="0" y="0"/>
+          <a:chExt cx="0" cy="0"/>
+        </a:xfrm>
+      </p:grpSpPr>
       <p:sp>
         <p:nvSpPr>
           <p:cNvPr id="2" name="Title 1"/>
@@ -7093,14 +7668,20 @@
           <a:lstStyle/>
           <a:p>
             <a:r>
-              <a:rPr sz="3200" b="1">
-                <a:solidFill>
-                  <a:srgbClr val="CC0066"/>
-                </a:solidFill>
+              <a:rPr sz="3200" b="1" dirty="0">
                 <a:latin typeface="Calibri"/>
               </a:rPr>
-              <a:t>Apply the Fragment to TrainerGW</a:t>
-            </a:r>
+              <a:t>Apply the Fragment to </a:t>
+            </a:r>
+            <a:r>
+              <a:rPr sz="3200" b="1" dirty="0" err="1">
+                <a:latin typeface="Calibri"/>
+              </a:rPr>
+              <a:t>TrainerGW</a:t>
+            </a:r>
+            <a:endParaRPr sz="3200" b="1" dirty="0">
+              <a:latin typeface="Calibri"/>
+            </a:endParaRPr>
           </a:p>
         </p:txBody>
       </p:sp>
@@ -7121,7 +7702,7 @@
           <a:noFill/>
         </p:spPr>
         <p:txBody>
-          <a:bodyPr wrap="square" anchor="t" lIns="45720" rIns="45720">
+          <a:bodyPr wrap="square" lIns="45720" rIns="45720" anchor="t">
             <a:spAutoFit/>
           </a:bodyPr>
           <a:lstStyle/>
@@ -7182,6 +7763,7 @@
           <a:lstStyle/>
           <a:p>
             <a:pPr algn="ctr"/>
+            <a:endParaRPr/>
           </a:p>
         </p:txBody>
       </p:sp>
@@ -7226,6 +7808,7 @@
           <a:lstStyle/>
           <a:p>
             <a:pPr algn="ctr"/>
+            <a:endParaRPr/>
           </a:p>
         </p:txBody>
       </p:sp>
@@ -7238,7 +7821,7 @@
         <p:spPr>
           <a:xfrm>
             <a:off x="1005840" y="1874519"/>
-            <a:ext cx="10241280" cy="4389120"/>
+            <a:ext cx="10241280" cy="4455066"/>
           </a:xfrm>
           <a:prstGeom prst="rect">
             <a:avLst/>
@@ -7257,14 +7840,29 @@
               </a:spcAft>
             </a:pPr>
             <a:r>
-              <a:rPr sz="1000" i="1">
+              <a:rPr sz="1050" i="1" dirty="0">
                 <a:solidFill>
                   <a:srgbClr val="808080"/>
                 </a:solidFill>
                 <a:latin typeface="Consolas"/>
               </a:rPr>
-              <a:t># Create the fragment in your meta-trainerdemo</a:t>
-            </a:r>
+              <a:t># Create the fragment in your meta-</a:t>
+            </a:r>
+            <a:r>
+              <a:rPr sz="1050" i="1" dirty="0" err="1">
+                <a:solidFill>
+                  <a:srgbClr val="808080"/>
+                </a:solidFill>
+                <a:latin typeface="Consolas"/>
+              </a:rPr>
+              <a:t>trainerdemo</a:t>
+            </a:r>
+            <a:endParaRPr sz="1050" i="1" dirty="0">
+              <a:solidFill>
+                <a:srgbClr val="808080"/>
+              </a:solidFill>
+              <a:latin typeface="Consolas"/>
+            </a:endParaRPr>
           </a:p>
           <a:p>
             <a:pPr>
@@ -7273,13 +7871,58 @@
               </a:spcAft>
             </a:pPr>
             <a:r>
-              <a:rPr sz="1000">
+              <a:rPr sz="1050" dirty="0" err="1">
                 <a:solidFill>
                   <a:srgbClr val="2D2D2D"/>
                 </a:solidFill>
                 <a:latin typeface="Consolas"/>
               </a:rPr>
-              <a:t>mkdir -p ../meta-trainerdemo/recipes-kernel/linux/files</a:t>
+              <a:t>mkdir</a:t>
+            </a:r>
+            <a:r>
+              <a:rPr sz="1050" dirty="0">
+                <a:solidFill>
+                  <a:srgbClr val="2D2D2D"/>
+                </a:solidFill>
+                <a:latin typeface="Consolas"/>
+              </a:rPr>
+              <a:t> -p ../meta-</a:t>
+            </a:r>
+            <a:r>
+              <a:rPr sz="1050" dirty="0" err="1">
+                <a:solidFill>
+                  <a:srgbClr val="2D2D2D"/>
+                </a:solidFill>
+                <a:latin typeface="Consolas"/>
+              </a:rPr>
+              <a:t>trainerdemo</a:t>
+            </a:r>
+            <a:r>
+              <a:rPr sz="1050" dirty="0">
+                <a:solidFill>
+                  <a:srgbClr val="2D2D2D"/>
+                </a:solidFill>
+                <a:latin typeface="Consolas"/>
+              </a:rPr>
+              <a:t>/recipes-kernel/</a:t>
+            </a:r>
+            <a:r>
+              <a:rPr sz="1050" dirty="0" err="1">
+                <a:solidFill>
+                  <a:srgbClr val="2D2D2D"/>
+                </a:solidFill>
+                <a:latin typeface="Consolas"/>
+              </a:rPr>
+              <a:t>linux</a:t>
+            </a:r>
+            <a:r>
+              <a:rPr sz="1050" dirty="0">
+                <a:solidFill>
+                  <a:srgbClr val="2D2D2D"/>
+                </a:solidFill>
+                <a:latin typeface="Consolas"/>
+              </a:rPr>
+              <a:t>/files</a:t>
             </a:r>
           </a:p>
           <a:p>
@@ -7289,7 +7932,7 @@
               </a:spcAft>
             </a:pPr>
             <a:r>
-              <a:rPr sz="1000">
+              <a:rPr sz="1050" dirty="0">
                 <a:solidFill>
                   <a:srgbClr val="2D2D2D"/>
                 </a:solidFill>
@@ -7305,13 +7948,67 @@
               </a:spcAft>
             </a:pPr>
             <a:r>
-              <a:rPr sz="1000">
+              <a:rPr sz="1050" dirty="0">
                 <a:solidFill>
                   <a:srgbClr val="2D2D2D"/>
                 </a:solidFill>
                 <a:latin typeface="Consolas"/>
               </a:rPr>
-              <a:t>cat &gt; ../meta-trainerdemo/recipes-kernel/linux/files/hardening.cfg &lt;&lt;'EOF'</a:t>
+              <a:t>cat &gt; ../meta-</a:t>
+            </a:r>
+            <a:r>
+              <a:rPr sz="1050" dirty="0" err="1">
+                <a:solidFill>
+                  <a:srgbClr val="2D2D2D"/>
+                </a:solidFill>
+                <a:latin typeface="Consolas"/>
+              </a:rPr>
+              <a:t>trainerdemo</a:t>
+            </a:r>
+            <a:r>
+              <a:rPr sz="1050" dirty="0">
+                <a:solidFill>
+                  <a:srgbClr val="2D2D2D"/>
+                </a:solidFill>
+                <a:latin typeface="Consolas"/>
+              </a:rPr>
+              <a:t>/recipes-kernel/</a:t>
+            </a:r>
+            <a:r>
+              <a:rPr sz="1050" dirty="0" err="1">
+                <a:solidFill>
+                  <a:srgbClr val="2D2D2D"/>
+                </a:solidFill>
+                <a:latin typeface="Consolas"/>
+              </a:rPr>
+              <a:t>linux</a:t>
+            </a:r>
+            <a:r>
+              <a:rPr sz="1050" dirty="0">
+                <a:solidFill>
+                  <a:srgbClr val="2D2D2D"/>
+                </a:solidFill>
+                <a:latin typeface="Consolas"/>
+              </a:rPr>
+              <a:t>/files/</a:t>
+            </a:r>
+            <a:r>
+              <a:rPr sz="1050" dirty="0" err="1">
+                <a:solidFill>
+                  <a:srgbClr val="2D2D2D"/>
+                </a:solidFill>
+                <a:latin typeface="Consolas"/>
+              </a:rPr>
+              <a:t>hardening.cfg</a:t>
+            </a:r>
+            <a:r>
+              <a:rPr sz="1050" dirty="0">
+                <a:solidFill>
+                  <a:srgbClr val="2D2D2D"/>
+                </a:solidFill>
+                <a:latin typeface="Consolas"/>
+              </a:rPr>
+              <a:t> &lt;&lt;'EOF'</a:t>
             </a:r>
           </a:p>
           <a:p>
@@ -7321,7 +8018,7 @@
               </a:spcAft>
             </a:pPr>
             <a:r>
-              <a:rPr sz="1000">
+              <a:rPr sz="1050" dirty="0">
                 <a:solidFill>
                   <a:srgbClr val="2D2D2D"/>
                 </a:solidFill>
@@ -7337,7 +8034,7 @@
               </a:spcAft>
             </a:pPr>
             <a:r>
-              <a:rPr sz="1000">
+              <a:rPr sz="1050" dirty="0">
                 <a:solidFill>
                   <a:srgbClr val="2D2D2D"/>
                 </a:solidFill>
@@ -7353,7 +8050,7 @@
               </a:spcAft>
             </a:pPr>
             <a:r>
-              <a:rPr sz="1000">
+              <a:rPr sz="1050" dirty="0">
                 <a:solidFill>
                   <a:srgbClr val="2D2D2D"/>
                 </a:solidFill>
@@ -7369,7 +8066,7 @@
               </a:spcAft>
             </a:pPr>
             <a:r>
-              <a:rPr sz="1000">
+              <a:rPr sz="1050" dirty="0">
                 <a:solidFill>
                   <a:srgbClr val="2D2D2D"/>
                 </a:solidFill>
@@ -7385,7 +8082,7 @@
               </a:spcAft>
             </a:pPr>
             <a:r>
-              <a:rPr sz="1000">
+              <a:rPr sz="1050" dirty="0">
                 <a:solidFill>
                   <a:srgbClr val="2D2D2D"/>
                 </a:solidFill>
@@ -7401,7 +8098,7 @@
               </a:spcAft>
             </a:pPr>
             <a:r>
-              <a:rPr sz="1000">
+              <a:rPr sz="1050" dirty="0">
                 <a:solidFill>
                   <a:srgbClr val="2D2D2D"/>
                 </a:solidFill>
@@ -7417,7 +8114,7 @@
               </a:spcAft>
             </a:pPr>
             <a:r>
-              <a:rPr sz="1000">
+              <a:rPr sz="1050" dirty="0">
                 <a:solidFill>
                   <a:srgbClr val="2D2D2D"/>
                 </a:solidFill>
@@ -7433,7 +8130,7 @@
               </a:spcAft>
             </a:pPr>
             <a:r>
-              <a:rPr sz="1000">
+              <a:rPr sz="1050" dirty="0">
                 <a:solidFill>
                   <a:srgbClr val="2D2D2D"/>
                 </a:solidFill>
@@ -7449,7 +8146,7 @@
               </a:spcAft>
             </a:pPr>
             <a:r>
-              <a:rPr sz="1000">
+              <a:rPr sz="1050" dirty="0">
                 <a:solidFill>
                   <a:srgbClr val="2D2D2D"/>
                 </a:solidFill>
@@ -7465,7 +8162,7 @@
               </a:spcAft>
             </a:pPr>
             <a:r>
-              <a:rPr sz="1000">
+              <a:rPr sz="1050" dirty="0">
                 <a:solidFill>
                   <a:srgbClr val="2D2D2D"/>
                 </a:solidFill>
@@ -7481,7 +8178,7 @@
               </a:spcAft>
             </a:pPr>
             <a:r>
-              <a:rPr sz="1000">
+              <a:rPr sz="1050" dirty="0">
                 <a:solidFill>
                   <a:srgbClr val="2D2D2D"/>
                 </a:solidFill>
@@ -7497,7 +8194,7 @@
               </a:spcAft>
             </a:pPr>
             <a:r>
-              <a:rPr sz="1000">
+              <a:rPr sz="1050" dirty="0">
                 <a:solidFill>
                   <a:srgbClr val="2D2D2D"/>
                 </a:solidFill>
@@ -7513,7 +8210,7 @@
               </a:spcAft>
             </a:pPr>
             <a:r>
-              <a:rPr sz="1000">
+              <a:rPr sz="1050" dirty="0">
                 <a:solidFill>
                   <a:srgbClr val="2D2D2D"/>
                 </a:solidFill>
@@ -7529,12 +8226,161 @@
               </a:spcAft>
             </a:pPr>
             <a:r>
-              <a:rPr sz="1000">
+              <a:rPr sz="1050" i="1" dirty="0">
+                <a:solidFill>
+                  <a:srgbClr val="808080"/>
+                </a:solidFill>
+                <a:latin typeface="Consolas"/>
+              </a:rPr>
+              <a:t># Wire it up via </a:t>
+            </a:r>
+            <a:r>
+              <a:rPr sz="1050" i="1" dirty="0" err="1">
+                <a:solidFill>
+                  <a:srgbClr val="808080"/>
+                </a:solidFill>
+                <a:latin typeface="Consolas"/>
+              </a:rPr>
+              <a:t>bbappend</a:t>
+            </a:r>
+            <a:endParaRPr sz="1050" i="1" dirty="0">
+              <a:solidFill>
+                <a:srgbClr val="808080"/>
+              </a:solidFill>
+              <a:latin typeface="Consolas"/>
+            </a:endParaRPr>
+          </a:p>
+          <a:p>
+            <a:pPr>
+              <a:spcAft>
+                <a:spcPts val="0"/>
+              </a:spcAft>
+            </a:pPr>
+            <a:r>
+              <a:rPr sz="1050" dirty="0">
                 <a:solidFill>
                   <a:srgbClr val="2D2D2D"/>
                 </a:solidFill>
                 <a:latin typeface="Consolas"/>
               </a:rPr>
+              <a:t>cat &gt; ../meta-</a:t>
+            </a:r>
+            <a:r>
+              <a:rPr sz="1050" dirty="0" err="1">
+                <a:solidFill>
+                  <a:srgbClr val="2D2D2D"/>
+                </a:solidFill>
+                <a:latin typeface="Consolas"/>
+              </a:rPr>
+              <a:t>trainerdemo</a:t>
+            </a:r>
+            <a:r>
+              <a:rPr sz="1050" dirty="0">
+                <a:solidFill>
+                  <a:srgbClr val="2D2D2D"/>
+                </a:solidFill>
+                <a:latin typeface="Consolas"/>
+              </a:rPr>
+              <a:t>/recipes-kernel/</a:t>
+            </a:r>
+            <a:r>
+              <a:rPr sz="1050" dirty="0" err="1">
+                <a:solidFill>
+                  <a:srgbClr val="2D2D2D"/>
+                </a:solidFill>
+                <a:latin typeface="Consolas"/>
+              </a:rPr>
+              <a:t>linux</a:t>
+            </a:r>
+            <a:r>
+              <a:rPr sz="1050" dirty="0">
+                <a:solidFill>
+                  <a:srgbClr val="2D2D2D"/>
+                </a:solidFill>
+                <a:latin typeface="Consolas"/>
+              </a:rPr>
+              <a:t>/</a:t>
+            </a:r>
+            <a:r>
+              <a:rPr sz="1050" dirty="0" err="1">
+                <a:solidFill>
+                  <a:srgbClr val="2D2D2D"/>
+                </a:solidFill>
+                <a:latin typeface="Consolas"/>
+              </a:rPr>
+              <a:t>linux-yocto.bbappend</a:t>
+            </a:r>
+            <a:r>
+              <a:rPr sz="1050" dirty="0">
+                <a:solidFill>
+                  <a:srgbClr val="2D2D2D"/>
+                </a:solidFill>
+                <a:latin typeface="Consolas"/>
+              </a:rPr>
+              <a:t> &lt;&lt;'EOF'</a:t>
+            </a:r>
+          </a:p>
+          <a:p>
+            <a:pPr>
+              <a:spcAft>
+                <a:spcPts val="0"/>
+              </a:spcAft>
+            </a:pPr>
+            <a:r>
+              <a:rPr sz="1050" dirty="0">
+                <a:solidFill>
+                  <a:srgbClr val="2D2D2D"/>
+                </a:solidFill>
+                <a:latin typeface="Consolas"/>
+              </a:rPr>
+              <a:t>FILESEXTRAPATHS:prepend := "${THISDIR}/files:"</a:t>
+            </a:r>
+          </a:p>
+          <a:p>
+            <a:pPr>
+              <a:spcAft>
+                <a:spcPts val="0"/>
+              </a:spcAft>
+            </a:pPr>
+            <a:r>
+              <a:rPr sz="1050" dirty="0">
+                <a:solidFill>
+                  <a:srgbClr val="2D2D2D"/>
+                </a:solidFill>
+                <a:latin typeface="Consolas"/>
+              </a:rPr>
+              <a:t>SRC_URI += "file://hardening.cfg"</a:t>
+            </a:r>
+          </a:p>
+          <a:p>
+            <a:pPr>
+              <a:spcAft>
+                <a:spcPts val="0"/>
+              </a:spcAft>
+            </a:pPr>
+            <a:r>
+              <a:rPr sz="1050" dirty="0">
+                <a:solidFill>
+                  <a:srgbClr val="2D2D2D"/>
+                </a:solidFill>
+                <a:latin typeface="Consolas"/>
+              </a:rPr>
+              <a:t>EOF</a:t>
+            </a:r>
+          </a:p>
+          <a:p>
+            <a:pPr>
+              <a:spcAft>
+                <a:spcPts val="0"/>
+              </a:spcAft>
+            </a:pPr>
+            <a:r>
+              <a:rPr sz="1050" dirty="0">
+                <a:solidFill>
+                  <a:srgbClr val="2D2D2D"/>
+                </a:solidFill>
+                <a:latin typeface="Consolas"/>
+              </a:rPr>
               <a:t> </a:t>
             </a:r>
           </a:p>
@@ -7545,13 +8391,31 @@
               </a:spcAft>
             </a:pPr>
             <a:r>
-              <a:rPr sz="1000" i="1">
+              <a:rPr sz="1050" i="1" dirty="0">
                 <a:solidFill>
                   <a:srgbClr val="808080"/>
                 </a:solidFill>
                 <a:latin typeface="Consolas"/>
               </a:rPr>
-              <a:t># Wire it up via bbappend</a:t>
+              <a:t># Rebuild kernel + image (</a:t>
+            </a:r>
+            <a:r>
+              <a:rPr sz="1050" i="1" dirty="0" err="1">
+                <a:solidFill>
+                  <a:srgbClr val="808080"/>
+                </a:solidFill>
+                <a:latin typeface="Consolas"/>
+              </a:rPr>
+              <a:t>sstate</a:t>
+            </a:r>
+            <a:r>
+              <a:rPr sz="1050" i="1" dirty="0">
+                <a:solidFill>
+                  <a:srgbClr val="808080"/>
+                </a:solidFill>
+                <a:latin typeface="Consolas"/>
+              </a:rPr>
+              <a:t> will handle most of it)</a:t>
             </a:r>
           </a:p>
           <a:p>
@@ -7561,13 +8425,13 @@
               </a:spcAft>
             </a:pPr>
             <a:r>
-              <a:rPr sz="1000">
+              <a:rPr sz="1050" dirty="0">
                 <a:solidFill>
                   <a:srgbClr val="2D2D2D"/>
                 </a:solidFill>
                 <a:latin typeface="Consolas"/>
               </a:rPr>
-              <a:t>cat &gt; ../meta-trainerdemo/recipes-kernel/linux/linux-yocto.bbappend &lt;&lt;'EOF'</a:t>
+              <a:t> </a:t>
             </a:r>
           </a:p>
           <a:p>
@@ -7577,13 +8441,13 @@
               </a:spcAft>
             </a:pPr>
             <a:r>
-              <a:rPr sz="1000">
-                <a:solidFill>
-                  <a:srgbClr val="2D2D2D"/>
+              <a:rPr sz="1050" i="1" dirty="0">
+                <a:solidFill>
+                  <a:srgbClr val="808080"/>
                 </a:solidFill>
                 <a:latin typeface="Consolas"/>
               </a:rPr>
-              <a:t>FILESEXTRAPATHS:prepend := "${THISDIR}/files:"</a:t>
+              <a:t># After boot, verify:</a:t>
             </a:r>
           </a:p>
           <a:p>
@@ -7593,141 +8457,31 @@
               </a:spcAft>
             </a:pPr>
             <a:r>
-              <a:rPr sz="1000">
-                <a:solidFill>
-                  <a:srgbClr val="2D2D2D"/>
+              <a:rPr sz="1050" i="1" dirty="0">
+                <a:solidFill>
+                  <a:srgbClr val="808080"/>
                 </a:solidFill>
                 <a:latin typeface="Consolas"/>
               </a:rPr>
-              <a:t>SRC_URI += "file://hardening.cfg"</a:t>
-            </a:r>
-          </a:p>
-          <a:p>
-            <a:pPr>
-              <a:spcAft>
-                <a:spcPts val="0"/>
-              </a:spcAft>
-            </a:pPr>
-            <a:r>
-              <a:rPr sz="1000">
-                <a:solidFill>
-                  <a:srgbClr val="2D2D2D"/>
+              <a:t># </a:t>
+            </a:r>
+            <a:r>
+              <a:rPr sz="1050" i="1" dirty="0" err="1">
+                <a:solidFill>
+                  <a:srgbClr val="808080"/>
                 </a:solidFill>
                 <a:latin typeface="Consolas"/>
               </a:rPr>
-              <a:t>EOF</a:t>
-            </a:r>
-          </a:p>
-          <a:p>
-            <a:pPr>
-              <a:spcAft>
-                <a:spcPts val="0"/>
-              </a:spcAft>
-            </a:pPr>
-            <a:r>
-              <a:rPr sz="1000">
-                <a:solidFill>
-                  <a:srgbClr val="2D2D2D"/>
+              <a:t>zcat</a:t>
+            </a:r>
+            <a:r>
+              <a:rPr sz="1050" i="1" dirty="0">
+                <a:solidFill>
+                  <a:srgbClr val="808080"/>
                 </a:solidFill>
                 <a:latin typeface="Consolas"/>
               </a:rPr>
-              <a:t> </a:t>
-            </a:r>
-          </a:p>
-          <a:p>
-            <a:pPr>
-              <a:spcAft>
-                <a:spcPts val="0"/>
-              </a:spcAft>
-            </a:pPr>
-            <a:r>
-              <a:rPr sz="1000" i="1">
-                <a:solidFill>
-                  <a:srgbClr val="808080"/>
-                </a:solidFill>
-                <a:latin typeface="Consolas"/>
-              </a:rPr>
-              <a:t># Rebuild kernel + image (sstate will handle most of it)</a:t>
-            </a:r>
-          </a:p>
-          <a:p>
-            <a:pPr>
-              <a:spcAft>
-                <a:spcPts val="0"/>
-              </a:spcAft>
-            </a:pPr>
-            <a:r>
-              <a:rPr sz="1000">
-                <a:solidFill>
-                  <a:srgbClr val="2D2D2D"/>
-                </a:solidFill>
-                <a:latin typeface="Consolas"/>
-              </a:rPr>
-              <a:t>bitbake virtual/kernel</a:t>
-            </a:r>
-          </a:p>
-          <a:p>
-            <a:pPr>
-              <a:spcAft>
-                <a:spcPts val="0"/>
-              </a:spcAft>
-            </a:pPr>
-            <a:r>
-              <a:rPr sz="1000">
-                <a:solidFill>
-                  <a:srgbClr val="2D2D2D"/>
-                </a:solidFill>
-                <a:latin typeface="Consolas"/>
-              </a:rPr>
-              <a:t>bitbake core-image-base</a:t>
-            </a:r>
-          </a:p>
-          <a:p>
-            <a:pPr>
-              <a:spcAft>
-                <a:spcPts val="0"/>
-              </a:spcAft>
-            </a:pPr>
-            <a:r>
-              <a:rPr sz="1000">
-                <a:solidFill>
-                  <a:srgbClr val="2D2D2D"/>
-                </a:solidFill>
-                <a:latin typeface="Consolas"/>
-              </a:rPr>
-              <a:t> </a:t>
-            </a:r>
-          </a:p>
-          <a:p>
-            <a:pPr>
-              <a:spcAft>
-                <a:spcPts val="0"/>
-              </a:spcAft>
-            </a:pPr>
-            <a:r>
-              <a:rPr sz="1000" i="1">
-                <a:solidFill>
-                  <a:srgbClr val="808080"/>
-                </a:solidFill>
-                <a:latin typeface="Consolas"/>
-              </a:rPr>
-              <a:t># After boot, verify:</a:t>
-            </a:r>
-          </a:p>
-          <a:p>
-            <a:pPr>
-              <a:spcAft>
-                <a:spcPts val="0"/>
-              </a:spcAft>
-            </a:pPr>
-            <a:r>
-              <a:rPr sz="1000" i="1">
-                <a:solidFill>
-                  <a:srgbClr val="808080"/>
-                </a:solidFill>
-                <a:latin typeface="Consolas"/>
-              </a:rPr>
-              <a:t># zcat /proc/config.gz | grep -E 'STACKPROTECTOR|FORTIFY|RANDOMIZE_BASE'</a:t>
+              <a:t> /proc/config.gz | grep -E 'STACKPROTECTOR|FORTIFY|RANDOMIZE_BASE'</a:t>
             </a:r>
           </a:p>
         </p:txBody>
@@ -7740,8 +8494,8 @@
 </p:sld>
 </file>
 
-<file path=ppt/slides/slide14.xml><?xml version="1.0" encoding="utf-8"?>
-<p:sld xmlns:a="http://schemas.openxmlformats.org/drawingml/2006/main" xmlns:p="http://schemas.openxmlformats.org/presentationml/2006/main" xmlns:r="http://schemas.openxmlformats.org/officeDocument/2006/relationships">
+<file path=ppt/slides/slide8.xml><?xml version="1.0" encoding="utf-8"?>
+<p:sld xmlns:a="http://schemas.openxmlformats.org/drawingml/2006/main" xmlns:r="http://schemas.openxmlformats.org/officeDocument/2006/relationships" xmlns:p="http://schemas.openxmlformats.org/presentationml/2006/main">
   <p:cSld>
     <p:spTree>
       <p:nvGrpSpPr>
@@ -7749,7 +8503,14 @@
         <p:cNvGrpSpPr/>
         <p:nvPr/>
       </p:nvGrpSpPr>
-      <p:grpSpPr/>
+      <p:grpSpPr>
+        <a:xfrm>
+          <a:off x="0" y="0"/>
+          <a:ext cx="0" cy="0"/>
+          <a:chOff x="0" y="0"/>
+          <a:chExt cx="0" cy="0"/>
+        </a:xfrm>
+      </p:grpSpPr>
       <p:sp>
         <p:nvSpPr>
           <p:cNvPr id="2" name="Title 1"/>
@@ -7766,13 +8527,22 @@
           <a:lstStyle/>
           <a:p>
             <a:r>
-              <a:rPr sz="3200" b="1">
-                <a:solidFill>
-                  <a:srgbClr val="CC0066"/>
-                </a:solidFill>
+              <a:rPr sz="3200" b="1" dirty="0">
                 <a:latin typeface="Calibri"/>
               </a:rPr>
-              <a:t>Module Signing — Bonus</a:t>
+              <a:t>Module Signing</a:t>
+            </a:r>
+            <a:r>
+              <a:rPr lang="en-IN" sz="3200" b="1" dirty="0">
+                <a:latin typeface="Calibri"/>
+              </a:rPr>
+              <a:t>:</a:t>
+            </a:r>
+            <a:r>
+              <a:rPr sz="3200" b="1" dirty="0">
+                <a:latin typeface="Calibri"/>
+              </a:rPr>
+              <a:t> Bonus</a:t>
             </a:r>
           </a:p>
         </p:txBody>
@@ -7794,7 +8564,7 @@
           <a:noFill/>
         </p:spPr>
         <p:txBody>
-          <a:bodyPr wrap="square" anchor="t" lIns="45720" rIns="45720">
+          <a:bodyPr wrap="square" lIns="45720" rIns="45720" anchor="t">
             <a:spAutoFit/>
           </a:bodyPr>
           <a:lstStyle/>
@@ -7855,6 +8625,7 @@
           <a:lstStyle/>
           <a:p>
             <a:pPr algn="ctr"/>
+            <a:endParaRPr/>
           </a:p>
         </p:txBody>
       </p:sp>
@@ -7899,6 +8670,7 @@
           <a:lstStyle/>
           <a:p>
             <a:pPr algn="ctr"/>
+            <a:endParaRPr/>
           </a:p>
         </p:txBody>
       </p:sp>
@@ -7911,7 +8683,7 @@
         <p:spPr>
           <a:xfrm>
             <a:off x="1005840" y="1874519"/>
-            <a:ext cx="10241280" cy="3931920"/>
+            <a:ext cx="10241280" cy="3754874"/>
           </a:xfrm>
           <a:prstGeom prst="rect">
             <a:avLst/>
@@ -7930,7 +8702,7 @@
               </a:spcAft>
             </a:pPr>
             <a:r>
-              <a:rPr sz="1100" i="1">
+              <a:rPr sz="1400" i="1">
                 <a:solidFill>
                   <a:srgbClr val="808080"/>
                 </a:solidFill>
@@ -7946,7 +8718,7 @@
               </a:spcAft>
             </a:pPr>
             <a:r>
-              <a:rPr sz="1100">
+              <a:rPr sz="1400">
                 <a:solidFill>
                   <a:srgbClr val="2D2D2D"/>
                 </a:solidFill>
@@ -7962,7 +8734,7 @@
               </a:spcAft>
             </a:pPr>
             <a:r>
-              <a:rPr sz="1100">
+              <a:rPr sz="1400">
                 <a:solidFill>
                   <a:srgbClr val="2D2D2D"/>
                 </a:solidFill>
@@ -7978,7 +8750,7 @@
               </a:spcAft>
             </a:pPr>
             <a:r>
-              <a:rPr sz="1100">
+              <a:rPr sz="1400">
                 <a:solidFill>
                   <a:srgbClr val="2D2D2D"/>
                 </a:solidFill>
@@ -7994,7 +8766,7 @@
               </a:spcAft>
             </a:pPr>
             <a:r>
-              <a:rPr sz="1100">
+              <a:rPr sz="1400">
                 <a:solidFill>
                   <a:srgbClr val="2D2D2D"/>
                 </a:solidFill>
@@ -8010,7 +8782,7 @@
               </a:spcAft>
             </a:pPr>
             <a:r>
-              <a:rPr sz="1100">
+              <a:rPr sz="1400">
                 <a:solidFill>
                   <a:srgbClr val="2D2D2D"/>
                 </a:solidFill>
@@ -8026,7 +8798,7 @@
               </a:spcAft>
             </a:pPr>
             <a:r>
-              <a:rPr sz="1100" i="1">
+              <a:rPr sz="1400" i="1">
                 <a:solidFill>
                   <a:srgbClr val="808080"/>
                 </a:solidFill>
@@ -8042,7 +8814,7 @@
               </a:spcAft>
             </a:pPr>
             <a:r>
-              <a:rPr sz="1100" i="1">
+              <a:rPr sz="1400" i="1">
                 <a:solidFill>
                   <a:srgbClr val="808080"/>
                 </a:solidFill>
@@ -8058,7 +8830,7 @@
               </a:spcAft>
             </a:pPr>
             <a:r>
-              <a:rPr sz="1100" i="1">
+              <a:rPr sz="1400" i="1">
                 <a:solidFill>
                   <a:srgbClr val="808080"/>
                 </a:solidFill>
@@ -8074,7 +8846,7 @@
               </a:spcAft>
             </a:pPr>
             <a:r>
-              <a:rPr sz="1100" i="1">
+              <a:rPr sz="1400" i="1">
                 <a:solidFill>
                   <a:srgbClr val="808080"/>
                 </a:solidFill>
@@ -8090,7 +8862,7 @@
               </a:spcAft>
             </a:pPr>
             <a:r>
-              <a:rPr sz="1100">
+              <a:rPr sz="1400">
                 <a:solidFill>
                   <a:srgbClr val="2D2D2D"/>
                 </a:solidFill>
@@ -8106,7 +8878,7 @@
               </a:spcAft>
             </a:pPr>
             <a:r>
-              <a:rPr sz="1100" i="1">
+              <a:rPr sz="1400" i="1">
                 <a:solidFill>
                   <a:srgbClr val="808080"/>
                 </a:solidFill>
@@ -8122,7 +8894,7 @@
               </a:spcAft>
             </a:pPr>
             <a:r>
-              <a:rPr sz="1100" i="1">
+              <a:rPr sz="1400" i="1">
                 <a:solidFill>
                   <a:srgbClr val="808080"/>
                 </a:solidFill>
@@ -8138,7 +8910,7 @@
               </a:spcAft>
             </a:pPr>
             <a:r>
-              <a:rPr sz="1100" i="1">
+              <a:rPr sz="1400" i="1">
                 <a:solidFill>
                   <a:srgbClr val="808080"/>
                 </a:solidFill>
@@ -8154,7 +8926,7 @@
               </a:spcAft>
             </a:pPr>
             <a:r>
-              <a:rPr sz="1100">
+              <a:rPr sz="1400">
                 <a:solidFill>
                   <a:srgbClr val="2D2D2D"/>
                 </a:solidFill>
@@ -8170,7 +8942,7 @@
               </a:spcAft>
             </a:pPr>
             <a:r>
-              <a:rPr sz="1100" i="1">
+              <a:rPr sz="1400" i="1">
                 <a:solidFill>
                   <a:srgbClr val="808080"/>
                 </a:solidFill>
@@ -8186,7 +8958,7 @@
               </a:spcAft>
             </a:pPr>
             <a:r>
-              <a:rPr sz="1100" i="1">
+              <a:rPr sz="1400" i="1">
                 <a:solidFill>
                   <a:srgbClr val="808080"/>
                 </a:solidFill>
@@ -8234,7 +9006,7 @@
           </a:fontRef>
         </p:style>
         <p:txBody>
-          <a:bodyPr rtlCol="0" anchor="ctr" lIns="228600" rIns="228600" wrap="square"/>
+          <a:bodyPr wrap="square" lIns="228600" rIns="228600" rtlCol="0" anchor="ctr"/>
           <a:lstStyle/>
           <a:p>
             <a:pPr algn="l"/>
@@ -8258,8 +9030,8 @@
 </p:sld>
 </file>
 
-<file path=ppt/slides/slide15.xml><?xml version="1.0" encoding="utf-8"?>
-<p:sld xmlns:a="http://schemas.openxmlformats.org/drawingml/2006/main" xmlns:p="http://schemas.openxmlformats.org/presentationml/2006/main" xmlns:r="http://schemas.openxmlformats.org/officeDocument/2006/relationships">
+<file path=ppt/slides/slide9.xml><?xml version="1.0" encoding="utf-8"?>
+<p:sld xmlns:a="http://schemas.openxmlformats.org/drawingml/2006/main" xmlns:r="http://schemas.openxmlformats.org/officeDocument/2006/relationships" xmlns:p="http://schemas.openxmlformats.org/presentationml/2006/main">
   <p:cSld>
     <p:spTree>
       <p:nvGrpSpPr>
@@ -8267,7 +9039,14 @@
         <p:cNvGrpSpPr/>
         <p:nvPr/>
       </p:nvGrpSpPr>
-      <p:grpSpPr/>
+      <p:grpSpPr>
+        <a:xfrm>
+          <a:off x="0" y="0"/>
+          <a:ext cx="0" cy="0"/>
+          <a:chOff x="0" y="0"/>
+          <a:chExt cx="0" cy="0"/>
+        </a:xfrm>
+      </p:grpSpPr>
       <p:sp>
         <p:nvSpPr>
           <p:cNvPr id="2" name="Title 1"/>
@@ -8312,7 +9091,7 @@
           <a:noFill/>
         </p:spPr>
         <p:txBody>
-          <a:bodyPr wrap="square" anchor="t" lIns="45720" rIns="45720">
+          <a:bodyPr wrap="square" lIns="45720" rIns="45720" anchor="t">
             <a:spAutoFit/>
           </a:bodyPr>
           <a:lstStyle/>
@@ -8367,7 +9146,7 @@
           </a:fontRef>
         </p:style>
         <p:txBody>
-          <a:bodyPr rtlCol="0" anchor="ctr" lIns="0" rIns="0"/>
+          <a:bodyPr lIns="0" rIns="0" rtlCol="0" anchor="ctr"/>
           <a:lstStyle/>
           <a:p>
             <a:pPr algn="ctr"/>
@@ -8400,7 +9179,7 @@
           <a:noFill/>
         </p:spPr>
         <p:txBody>
-          <a:bodyPr wrap="square" anchor="t" lIns="45720" rIns="45720">
+          <a:bodyPr wrap="square" lIns="45720" rIns="45720" anchor="t">
             <a:spAutoFit/>
           </a:bodyPr>
           <a:lstStyle/>
@@ -8435,7 +9214,7 @@
           <a:noFill/>
         </p:spPr>
         <p:txBody>
-          <a:bodyPr wrap="square" anchor="t" lIns="45720" rIns="45720">
+          <a:bodyPr wrap="square" lIns="45720" rIns="45720" anchor="t">
             <a:spAutoFit/>
           </a:bodyPr>
           <a:lstStyle/>
@@ -8490,7 +9269,7 @@
           </a:fontRef>
         </p:style>
         <p:txBody>
-          <a:bodyPr rtlCol="0" anchor="ctr" lIns="0" rIns="0"/>
+          <a:bodyPr lIns="0" rIns="0" rtlCol="0" anchor="ctr"/>
           <a:lstStyle/>
           <a:p>
             <a:pPr algn="ctr"/>
@@ -8523,7 +9302,7 @@
           <a:noFill/>
         </p:spPr>
         <p:txBody>
-          <a:bodyPr wrap="square" anchor="t" lIns="45720" rIns="45720">
+          <a:bodyPr wrap="square" lIns="45720" rIns="45720" anchor="t">
             <a:spAutoFit/>
           </a:bodyPr>
           <a:lstStyle/>
@@ -8558,7 +9337,7 @@
           <a:noFill/>
         </p:spPr>
         <p:txBody>
-          <a:bodyPr wrap="square" anchor="t" lIns="45720" rIns="45720">
+          <a:bodyPr wrap="square" lIns="45720" rIns="45720" anchor="t">
             <a:spAutoFit/>
           </a:bodyPr>
           <a:lstStyle/>
@@ -8613,7 +9392,7 @@
           </a:fontRef>
         </p:style>
         <p:txBody>
-          <a:bodyPr rtlCol="0" anchor="ctr" lIns="0" rIns="0"/>
+          <a:bodyPr lIns="0" rIns="0" rtlCol="0" anchor="ctr"/>
           <a:lstStyle/>
           <a:p>
             <a:pPr algn="ctr"/>
@@ -8646,7 +9425,7 @@
           <a:noFill/>
         </p:spPr>
         <p:txBody>
-          <a:bodyPr wrap="square" anchor="t" lIns="45720" rIns="45720">
+          <a:bodyPr wrap="square" lIns="45720" rIns="45720" anchor="t">
             <a:spAutoFit/>
           </a:bodyPr>
           <a:lstStyle/>
@@ -8681,7 +9460,7 @@
           <a:noFill/>
         </p:spPr>
         <p:txBody>
-          <a:bodyPr wrap="square" anchor="t" lIns="45720" rIns="45720">
+          <a:bodyPr wrap="square" lIns="45720" rIns="45720" anchor="t">
             <a:spAutoFit/>
           </a:bodyPr>
           <a:lstStyle/>
@@ -8736,7 +9515,7 @@
           </a:fontRef>
         </p:style>
         <p:txBody>
-          <a:bodyPr rtlCol="0" anchor="ctr" lIns="0" rIns="0"/>
+          <a:bodyPr lIns="0" rIns="0" rtlCol="0" anchor="ctr"/>
           <a:lstStyle/>
           <a:p>
             <a:pPr algn="ctr"/>
@@ -8769,7 +9548,7 @@
           <a:noFill/>
         </p:spPr>
         <p:txBody>
-          <a:bodyPr wrap="square" anchor="t" lIns="45720" rIns="45720">
+          <a:bodyPr wrap="square" lIns="45720" rIns="45720" anchor="t">
             <a:spAutoFit/>
           </a:bodyPr>
           <a:lstStyle/>
@@ -8804,7 +9583,7 @@
           <a:noFill/>
         </p:spPr>
         <p:txBody>
-          <a:bodyPr wrap="square" anchor="t" lIns="45720" rIns="45720">
+          <a:bodyPr wrap="square" lIns="45720" rIns="45720" anchor="t">
             <a:spAutoFit/>
           </a:bodyPr>
           <a:lstStyle/>
@@ -8859,7 +9638,7 @@
           </a:fontRef>
         </p:style>
         <p:txBody>
-          <a:bodyPr rtlCol="0" anchor="ctr" lIns="0" rIns="0"/>
+          <a:bodyPr lIns="0" rIns="0" rtlCol="0" anchor="ctr"/>
           <a:lstStyle/>
           <a:p>
             <a:pPr algn="ctr"/>
@@ -8892,7 +9671,7 @@
           <a:noFill/>
         </p:spPr>
         <p:txBody>
-          <a:bodyPr wrap="square" anchor="t" lIns="45720" rIns="45720">
+          <a:bodyPr wrap="square" lIns="45720" rIns="45720" anchor="t">
             <a:spAutoFit/>
           </a:bodyPr>
           <a:lstStyle/>
@@ -8927,7 +9706,7 @@
           <a:noFill/>
         </p:spPr>
         <p:txBody>
-          <a:bodyPr wrap="square" anchor="t" lIns="45720" rIns="45720">
+          <a:bodyPr wrap="square" lIns="45720" rIns="45720" anchor="t">
             <a:spAutoFit/>
           </a:bodyPr>
           <a:lstStyle/>
@@ -8982,12 +9761,12 @@
           </a:fontRef>
         </p:style>
         <p:txBody>
-          <a:bodyPr rtlCol="0" anchor="ctr" lIns="228600"/>
+          <a:bodyPr lIns="228600" rtlCol="0" anchor="ctr"/>
           <a:lstStyle/>
           <a:p>
             <a:pPr algn="ctr"/>
             <a:r>
-              <a:rPr sz="1400" b="1">
+              <a:rPr sz="1400" b="1" dirty="0">
                 <a:solidFill>
                   <a:srgbClr val="663399"/>
                 </a:solidFill>
@@ -8996,571 +9775,13 @@
               <a:t>Next session  →  </a:t>
             </a:r>
             <a:r>
-              <a:rPr sz="1400">
+              <a:rPr sz="1400" dirty="0">
                 <a:solidFill>
                   <a:srgbClr val="333333"/>
                 </a:solidFill>
                 <a:latin typeface="Calibri"/>
               </a:rPr>
-              <a:t>Device Tree Debugging (60 min)</a:t>
-            </a:r>
-          </a:p>
-        </p:txBody>
-      </p:sp>
-    </p:spTree>
-  </p:cSld>
-  <p:clrMapOvr>
-    <a:masterClrMapping/>
-  </p:clrMapOvr>
-</p:sld>
-</file>
-
-<file path=ppt/slides/slide7.xml><?xml version="1.0" encoding="utf-8"?>
-<p:sld xmlns:a="http://schemas.openxmlformats.org/drawingml/2006/main" xmlns:p="http://schemas.openxmlformats.org/presentationml/2006/main" xmlns:r="http://schemas.openxmlformats.org/officeDocument/2006/relationships">
-  <p:cSld>
-    <p:spTree>
-      <p:nvGrpSpPr>
-        <p:cNvPr id="1" name=""/>
-        <p:cNvGrpSpPr/>
-        <p:nvPr/>
-      </p:nvGrpSpPr>
-      <p:grpSpPr/>
-      <p:sp>
-        <p:nvSpPr>
-          <p:cNvPr id="2" name="Title 1"/>
-          <p:cNvSpPr>
-            <a:spLocks noGrp="1"/>
-          </p:cNvSpPr>
-          <p:nvPr>
-            <p:ph type="ctrTitle"/>
-          </p:nvPr>
-        </p:nvSpPr>
-        <p:spPr/>
-        <p:txBody>
-          <a:bodyPr/>
-          <a:lstStyle/>
-          <a:p>
-            <a:r>
-              <a:rPr sz="4400" b="1">
-                <a:solidFill>
-                  <a:srgbClr val="FFFFFF"/>
-                </a:solidFill>
-                <a:latin typeface="Calibri"/>
-              </a:rPr>
-              <a:t>Kernel Hardening (KSPP)</a:t>
-            </a:r>
-          </a:p>
-        </p:txBody>
-      </p:sp>
-      <p:sp>
-        <p:nvSpPr>
-          <p:cNvPr id="3" name="Subtitle 2"/>
-          <p:cNvSpPr>
-            <a:spLocks noGrp="1"/>
-          </p:cNvSpPr>
-          <p:nvPr>
-            <p:ph type="subTitle" idx="1"/>
-          </p:nvPr>
-        </p:nvSpPr>
-        <p:spPr/>
-        <p:txBody>
-          <a:bodyPr/>
-          <a:lstStyle/>
-          <a:p>
-            <a:r>
-              <a:rPr sz="2200" i="1">
-                <a:solidFill>
-                  <a:srgbClr val="FFFFFF"/>
-                </a:solidFill>
-                <a:latin typeface="Calibri"/>
-              </a:rPr>
-              <a:t>Day 3 • Session 2 • 45 minutes</a:t>
-            </a:r>
-          </a:p>
-          <a:p>
-            <a:r>
-              <a:rPr sz="1800">
-                <a:solidFill>
-                  <a:srgbClr val="FFFFFF"/>
-                </a:solidFill>
-                <a:latin typeface="Calibri"/>
-              </a:rPr>
-              <a:t>Defending against entire attack classes</a:t>
-            </a:r>
-          </a:p>
-        </p:txBody>
-      </p:sp>
-    </p:spTree>
-  </p:cSld>
-  <p:clrMapOvr>
-    <a:masterClrMapping/>
-  </p:clrMapOvr>
-</p:sld>
-</file>
-
-<file path=ppt/slides/slide8.xml><?xml version="1.0" encoding="utf-8"?>
-<p:sld xmlns:a="http://schemas.openxmlformats.org/drawingml/2006/main" xmlns:p="http://schemas.openxmlformats.org/presentationml/2006/main" xmlns:r="http://schemas.openxmlformats.org/officeDocument/2006/relationships">
-  <p:cSld>
-    <p:spTree>
-      <p:nvGrpSpPr>
-        <p:cNvPr id="1" name=""/>
-        <p:cNvGrpSpPr/>
-        <p:nvPr/>
-      </p:nvGrpSpPr>
-      <p:grpSpPr/>
-      <p:sp>
-        <p:nvSpPr>
-          <p:cNvPr id="2" name="Title 1"/>
-          <p:cNvSpPr>
-            <a:spLocks noGrp="1"/>
-          </p:cNvSpPr>
-          <p:nvPr>
-            <p:ph type="title"/>
-          </p:nvPr>
-        </p:nvSpPr>
-        <p:spPr/>
-        <p:txBody>
-          <a:bodyPr/>
-          <a:lstStyle/>
-          <a:p>
-            <a:r>
-              <a:rPr sz="3200" b="1">
-                <a:solidFill>
-                  <a:srgbClr val="CC0066"/>
-                </a:solidFill>
-                <a:latin typeface="Calibri"/>
-              </a:rPr>
-              <a:t>Session Agenda</a:t>
-            </a:r>
-          </a:p>
-        </p:txBody>
-      </p:sp>
-      <p:sp>
-        <p:nvSpPr>
-          <p:cNvPr id="3" name="TextBox 2"/>
-          <p:cNvSpPr txBox="1"/>
-          <p:nvPr/>
-        </p:nvSpPr>
-        <p:spPr>
-          <a:xfrm>
-            <a:off x="822960" y="1463040"/>
-            <a:ext cx="10515600" cy="5029200"/>
-          </a:xfrm>
-          <a:prstGeom prst="rect">
-            <a:avLst/>
-          </a:prstGeom>
-          <a:noFill/>
-        </p:spPr>
-        <p:txBody>
-          <a:bodyPr wrap="square" lIns="45720" rIns="45720">
-            <a:spAutoFit/>
-          </a:bodyPr>
-          <a:lstStyle/>
-          <a:p>
-            <a:pPr>
-              <a:spcAft>
-                <a:spcPts val="600"/>
-              </a:spcAft>
-            </a:pPr>
-            <a:r>
-              <a:rPr sz="2000" b="0" i="0">
-                <a:solidFill>
-                  <a:srgbClr val="333333"/>
-                </a:solidFill>
-                <a:latin typeface="Calibri"/>
-              </a:rPr>
-              <a:t>1.  What KSPP is and why it exists</a:t>
-            </a:r>
-          </a:p>
-          <a:p>
-            <a:pPr>
-              <a:spcAft>
-                <a:spcPts val="600"/>
-              </a:spcAft>
-            </a:pPr>
-            <a:r>
-              <a:rPr sz="2000" b="0" i="0">
-                <a:solidFill>
-                  <a:srgbClr val="333333"/>
-                </a:solidFill>
-                <a:latin typeface="Calibri"/>
-              </a:rPr>
-              <a:t>2.  Categories of kernel hardening</a:t>
-            </a:r>
-          </a:p>
-          <a:p>
-            <a:pPr>
-              <a:spcAft>
-                <a:spcPts val="600"/>
-              </a:spcAft>
-            </a:pPr>
-            <a:r>
-              <a:rPr sz="2000" b="0" i="0">
-                <a:solidFill>
-                  <a:srgbClr val="333333"/>
-                </a:solidFill>
-                <a:latin typeface="Calibri"/>
-              </a:rPr>
-              <a:t>3.  Key CONFIG options walkthrough</a:t>
-            </a:r>
-          </a:p>
-          <a:p>
-            <a:pPr>
-              <a:spcAft>
-                <a:spcPts val="600"/>
-              </a:spcAft>
-            </a:pPr>
-            <a:r>
-              <a:rPr sz="2000" b="0" i="0">
-                <a:solidFill>
-                  <a:srgbClr val="333333"/>
-                </a:solidFill>
-                <a:latin typeface="Calibri"/>
-              </a:rPr>
-              <a:t>4.  Cost vs benefit</a:t>
-            </a:r>
-          </a:p>
-          <a:p>
-            <a:pPr>
-              <a:spcAft>
-                <a:spcPts val="600"/>
-              </a:spcAft>
-            </a:pPr>
-            <a:r>
-              <a:rPr sz="2000" b="0" i="0">
-                <a:solidFill>
-                  <a:srgbClr val="333333"/>
-                </a:solidFill>
-                <a:latin typeface="Calibri"/>
-              </a:rPr>
-              <a:t>5.  Applying the hardening fragment to TrainerGW</a:t>
-            </a:r>
-          </a:p>
-          <a:p>
-            <a:pPr>
-              <a:spcAft>
-                <a:spcPts val="600"/>
-              </a:spcAft>
-            </a:pPr>
-            <a:r>
-              <a:rPr sz="2000" b="0" i="0">
-                <a:solidFill>
-                  <a:srgbClr val="333333"/>
-                </a:solidFill>
-                <a:latin typeface="Calibri"/>
-              </a:rPr>
-              <a:t>6.  Module signing in 60 seconds</a:t>
-            </a:r>
-          </a:p>
-        </p:txBody>
-      </p:sp>
-    </p:spTree>
-  </p:cSld>
-  <p:clrMapOvr>
-    <a:masterClrMapping/>
-  </p:clrMapOvr>
-</p:sld>
-</file>
-
-<file path=ppt/slides/slide9.xml><?xml version="1.0" encoding="utf-8"?>
-<p:sld xmlns:a="http://schemas.openxmlformats.org/drawingml/2006/main" xmlns:p="http://schemas.openxmlformats.org/presentationml/2006/main" xmlns:r="http://schemas.openxmlformats.org/officeDocument/2006/relationships">
-  <p:cSld>
-    <p:spTree>
-      <p:nvGrpSpPr>
-        <p:cNvPr id="1" name=""/>
-        <p:cNvGrpSpPr/>
-        <p:nvPr/>
-      </p:nvGrpSpPr>
-      <p:grpSpPr/>
-      <p:sp>
-        <p:nvSpPr>
-          <p:cNvPr id="2" name="Title 1"/>
-          <p:cNvSpPr>
-            <a:spLocks noGrp="1"/>
-          </p:cNvSpPr>
-          <p:nvPr>
-            <p:ph type="title"/>
-          </p:nvPr>
-        </p:nvSpPr>
-        <p:spPr/>
-        <p:txBody>
-          <a:bodyPr/>
-          <a:lstStyle/>
-          <a:p>
-            <a:r>
-              <a:rPr sz="3200" b="1">
-                <a:solidFill>
-                  <a:srgbClr val="CC0066"/>
-                </a:solidFill>
-                <a:latin typeface="Calibri"/>
-              </a:rPr>
-              <a:t>What KSPP Is</a:t>
-            </a:r>
-          </a:p>
-        </p:txBody>
-      </p:sp>
-      <p:sp>
-        <p:nvSpPr>
-          <p:cNvPr id="3" name="TextBox 2"/>
-          <p:cNvSpPr txBox="1"/>
-          <p:nvPr/>
-        </p:nvSpPr>
-        <p:spPr>
-          <a:xfrm>
-            <a:off x="822960" y="1417320"/>
-            <a:ext cx="10515600" cy="365760"/>
-          </a:xfrm>
-          <a:prstGeom prst="rect">
-            <a:avLst/>
-          </a:prstGeom>
-          <a:noFill/>
-        </p:spPr>
-        <p:txBody>
-          <a:bodyPr wrap="square" anchor="t" lIns="45720" rIns="45720">
-            <a:spAutoFit/>
-          </a:bodyPr>
-          <a:lstStyle/>
-          <a:p>
-            <a:pPr algn="l"/>
-            <a:r>
-              <a:rPr sz="1500" b="0" i="1">
-                <a:solidFill>
-                  <a:srgbClr val="666666"/>
-                </a:solidFill>
-                <a:latin typeface="Calibri"/>
-              </a:rPr>
-              <a:t>Kernel Self Protection Project — a community effort to make kernels harder to exploit.</a:t>
-            </a:r>
-          </a:p>
-        </p:txBody>
-      </p:sp>
-      <p:sp>
-        <p:nvSpPr>
-          <p:cNvPr id="4" name="TextBox 3"/>
-          <p:cNvSpPr txBox="1"/>
-          <p:nvPr/>
-        </p:nvSpPr>
-        <p:spPr>
-          <a:xfrm>
-            <a:off x="822960" y="1783080"/>
-            <a:ext cx="10515600" cy="4572000"/>
-          </a:xfrm>
-          <a:prstGeom prst="rect">
-            <a:avLst/>
-          </a:prstGeom>
-          <a:noFill/>
-        </p:spPr>
-        <p:txBody>
-          <a:bodyPr wrap="square" lIns="45720" rIns="45720">
-            <a:spAutoFit/>
-          </a:bodyPr>
-          <a:lstStyle/>
-          <a:p>
-            <a:pPr>
-              <a:spcAft>
-                <a:spcPts val="400"/>
-              </a:spcAft>
-            </a:pPr>
-            <a:r>
-              <a:rPr sz="1600" b="1" i="0">
-                <a:solidFill>
-                  <a:srgbClr val="CC0066"/>
-                </a:solidFill>
-                <a:latin typeface="Calibri"/>
-              </a:rPr>
-              <a:t>The premise</a:t>
-            </a:r>
-          </a:p>
-          <a:p>
-            <a:pPr>
-              <a:spcAft>
-                <a:spcPts val="1000"/>
-              </a:spcAft>
-            </a:pPr>
-            <a:r>
-              <a:rPr sz="1300" b="0" i="0">
-                <a:solidFill>
-                  <a:srgbClr val="333333"/>
-                </a:solidFill>
-                <a:latin typeface="Calibri"/>
-              </a:rPr>
-              <a:t>Kernel bugs will exist. Make them harder to weaponize.</a:t>
-            </a:r>
-          </a:p>
-          <a:p>
-            <a:pPr>
-              <a:spcAft>
-                <a:spcPts val="400"/>
-              </a:spcAft>
-            </a:pPr>
-            <a:r>
-              <a:rPr sz="1600" b="1" i="0">
-                <a:solidFill>
-                  <a:srgbClr val="CC0066"/>
-                </a:solidFill>
-                <a:latin typeface="Calibri"/>
-              </a:rPr>
-              <a:t>KSPP's approach</a:t>
-            </a:r>
-          </a:p>
-          <a:p>
-            <a:pPr>
-              <a:spcAft>
-                <a:spcPts val="400"/>
-              </a:spcAft>
-            </a:pPr>
-            <a:r>
-              <a:rPr sz="1300" b="0" i="0">
-                <a:solidFill>
-                  <a:srgbClr val="333333"/>
-                </a:solidFill>
-                <a:latin typeface="Calibri"/>
-              </a:rPr>
-              <a:t>• Maintain a recommended kernel config</a:t>
-            </a:r>
-          </a:p>
-          <a:p>
-            <a:pPr>
-              <a:spcAft>
-                <a:spcPts val="400"/>
-              </a:spcAft>
-            </a:pPr>
-            <a:r>
-              <a:rPr sz="1300" b="0" i="0">
-                <a:solidFill>
-                  <a:srgbClr val="333333"/>
-                </a:solidFill>
-                <a:latin typeface="Calibri"/>
-              </a:rPr>
-              <a:t>• Track which kernel versions implement which protections</a:t>
-            </a:r>
-          </a:p>
-          <a:p>
-            <a:pPr>
-              <a:spcAft>
-                <a:spcPts val="1000"/>
-              </a:spcAft>
-            </a:pPr>
-            <a:r>
-              <a:rPr sz="1300" b="0" i="0">
-                <a:solidFill>
-                  <a:srgbClr val="333333"/>
-                </a:solidFill>
-                <a:latin typeface="Calibri"/>
-              </a:rPr>
-              <a:t>• Document what each option blocks</a:t>
-            </a:r>
-          </a:p>
-          <a:p>
-            <a:pPr>
-              <a:spcAft>
-                <a:spcPts val="400"/>
-              </a:spcAft>
-            </a:pPr>
-            <a:r>
-              <a:rPr sz="1600" b="1" i="0">
-                <a:solidFill>
-                  <a:srgbClr val="663399"/>
-                </a:solidFill>
-                <a:latin typeface="Calibri"/>
-              </a:rPr>
-              <a:t>Why apply it for embedded</a:t>
-            </a:r>
-          </a:p>
-          <a:p>
-            <a:pPr>
-              <a:spcAft>
-                <a:spcPts val="400"/>
-              </a:spcAft>
-            </a:pPr>
-            <a:r>
-              <a:rPr sz="1300" b="0" i="0">
-                <a:solidFill>
-                  <a:srgbClr val="333333"/>
-                </a:solidFill>
-                <a:latin typeface="Calibri"/>
-              </a:rPr>
-              <a:t>• Devices are often unpatched for years</a:t>
-            </a:r>
-          </a:p>
-          <a:p>
-            <a:pPr>
-              <a:spcAft>
-                <a:spcPts val="400"/>
-              </a:spcAft>
-            </a:pPr>
-            <a:r>
-              <a:rPr sz="1300" b="0" i="0">
-                <a:solidFill>
-                  <a:srgbClr val="333333"/>
-                </a:solidFill>
-                <a:latin typeface="Calibri"/>
-              </a:rPr>
-              <a:t>• Physical access is often easier than for servers</a:t>
-            </a:r>
-          </a:p>
-          <a:p>
-            <a:pPr>
-              <a:spcAft>
-                <a:spcPts val="400"/>
-              </a:spcAft>
-            </a:pPr>
-            <a:r>
-              <a:rPr sz="1300" b="0" i="0">
-                <a:solidFill>
-                  <a:srgbClr val="333333"/>
-                </a:solidFill>
-                <a:latin typeface="Calibri"/>
-              </a:rPr>
-              <a:t>• Compromise is hard to detect remotely</a:t>
-            </a:r>
-          </a:p>
-          <a:p>
-            <a:pPr>
-              <a:spcAft>
-                <a:spcPts val="1000"/>
-              </a:spcAft>
-            </a:pPr>
-            <a:r>
-              <a:rPr sz="1300" b="0" i="0">
-                <a:solidFill>
-                  <a:srgbClr val="333333"/>
-                </a:solidFill>
-                <a:latin typeface="Calibri"/>
-              </a:rPr>
-              <a:t>• Defense-in-depth buys you time</a:t>
-            </a:r>
-          </a:p>
-          <a:p>
-            <a:pPr>
-              <a:spcAft>
-                <a:spcPts val="400"/>
-              </a:spcAft>
-            </a:pPr>
-            <a:r>
-              <a:rPr sz="1600" b="1" i="0">
-                <a:solidFill>
-                  <a:srgbClr val="663399"/>
-                </a:solidFill>
-                <a:latin typeface="Calibri"/>
-              </a:rPr>
-              <a:t>Reference</a:t>
-            </a:r>
-          </a:p>
-          <a:p>
-            <a:pPr>
-              <a:spcAft>
-                <a:spcPts val="400"/>
-              </a:spcAft>
-            </a:pPr>
-            <a:r>
-              <a:rPr sz="1300" b="0" i="0">
-                <a:solidFill>
-                  <a:srgbClr val="333333"/>
-                </a:solidFill>
-                <a:latin typeface="Consolas"/>
-              </a:rPr>
-              <a:t>kspp.github.io/Recommended_Settings — the canonical list</a:t>
+              <a:t>Device Tree Debugging</a:t>
             </a:r>
           </a:p>
         </p:txBody>
